--- a/docs/산출물_20260921/09_함수단_흐름도.pptx
+++ b/docs/산출물_20260921/09_함수단_흐름도.pptx
@@ -3117,7 +3117,7 @@
             <a:srgbClr val="1E2761"/>
           </a:solidFill>
           <a:ln>
-            <a:noFill/>
+            <a:solidFill/>
           </a:ln>
           <a:effectLst/>
         </p:spPr>
@@ -3158,6 +3158,9 @@
             <a:avLst/>
           </a:prstGeom>
           <a:noFill/>
+          <a:ln>
+            <a:solidFill/>
+          </a:ln>
         </p:spPr>
         <p:txBody>
           <a:bodyPr wrap="square" anchor="t" lIns="36576" rIns="36576" tIns="0" bIns="0">
@@ -3193,6 +3196,9 @@
             <a:avLst/>
           </a:prstGeom>
           <a:noFill/>
+          <a:ln>
+            <a:solidFill/>
+          </a:ln>
         </p:spPr>
         <p:txBody>
           <a:bodyPr wrap="square" anchor="t" lIns="36576" rIns="36576" tIns="0" bIns="0">
@@ -3228,6 +3234,9 @@
             <a:avLst/>
           </a:prstGeom>
           <a:noFill/>
+          <a:ln>
+            <a:solidFill/>
+          </a:ln>
         </p:spPr>
         <p:txBody>
           <a:bodyPr wrap="square" anchor="t" lIns="36576" rIns="36576" tIns="0" bIns="0">
@@ -3263,6 +3272,9 @@
             <a:avLst/>
           </a:prstGeom>
           <a:noFill/>
+          <a:ln>
+            <a:solidFill/>
+          </a:ln>
         </p:spPr>
         <p:txBody>
           <a:bodyPr wrap="square" anchor="t" lIns="36576" rIns="36576" tIns="0" bIns="0">
@@ -3298,6 +3310,9 @@
             <a:avLst/>
           </a:prstGeom>
           <a:noFill/>
+          <a:ln>
+            <a:solidFill/>
+          </a:ln>
         </p:spPr>
         <p:txBody>
           <a:bodyPr wrap="square" anchor="t" lIns="36576" rIns="36576" tIns="0" bIns="0">
@@ -3351,6 +3366,9 @@
             <a:avLst/>
           </a:prstGeom>
           <a:noFill/>
+          <a:ln>
+            <a:solidFill/>
+          </a:ln>
         </p:spPr>
         <p:txBody>
           <a:bodyPr wrap="square" anchor="ctr" lIns="36576" rIns="36576" tIns="0" bIns="0">
@@ -3386,6 +3404,9 @@
             <a:avLst/>
           </a:prstGeom>
           <a:noFill/>
+          <a:ln>
+            <a:solidFill/>
+          </a:ln>
         </p:spPr>
         <p:txBody>
           <a:bodyPr wrap="square" anchor="t" lIns="36576" rIns="36576" tIns="0" bIns="0">
@@ -3421,6 +3442,9 @@
             <a:avLst/>
           </a:prstGeom>
           <a:noFill/>
+          <a:ln>
+            <a:solidFill/>
+          </a:ln>
         </p:spPr>
         <p:txBody>
           <a:bodyPr wrap="square" anchor="t" lIns="36576" rIns="36576" tIns="0" bIns="0">
@@ -3456,11 +3480,11 @@
             <a:avLst/>
           </a:prstGeom>
           <a:solidFill>
-            <a:srgbClr val="ECF2FB"/>
+            <a:srgbClr val="CFE0FA"/>
           </a:solidFill>
           <a:ln w="15875">
             <a:solidFill>
-              <a:srgbClr val="266EBE"/>
+              <a:srgbClr val="1B5FB0"/>
             </a:solidFill>
           </a:ln>
           <a:effectLst/>
@@ -3511,6 +3535,9 @@
             <a:avLst/>
           </a:prstGeom>
           <a:noFill/>
+          <a:ln>
+            <a:solidFill/>
+          </a:ln>
         </p:spPr>
         <p:txBody>
           <a:bodyPr wrap="square" anchor="t" lIns="36576" rIns="36576" tIns="0" bIns="0">
@@ -3582,11 +3609,11 @@
             <a:avLst/>
           </a:prstGeom>
           <a:solidFill>
-            <a:srgbClr val="ECF2FB"/>
+            <a:srgbClr val="CFE0FA"/>
           </a:solidFill>
           <a:ln w="15875">
             <a:solidFill>
-              <a:srgbClr val="266EBE"/>
+              <a:srgbClr val="1B5FB0"/>
             </a:solidFill>
           </a:ln>
           <a:effectLst/>
@@ -3637,6 +3664,9 @@
             <a:avLst/>
           </a:prstGeom>
           <a:noFill/>
+          <a:ln>
+            <a:solidFill/>
+          </a:ln>
         </p:spPr>
         <p:txBody>
           <a:bodyPr wrap="square" anchor="t" lIns="36576" rIns="36576" tIns="0" bIns="0">
@@ -3708,11 +3738,11 @@
             <a:avLst/>
           </a:prstGeom>
           <a:solidFill>
-            <a:srgbClr val="ECF2FB"/>
+            <a:srgbClr val="CFE0FA"/>
           </a:solidFill>
           <a:ln w="15875">
             <a:solidFill>
-              <a:srgbClr val="266EBE"/>
+              <a:srgbClr val="1B5FB0"/>
             </a:solidFill>
           </a:ln>
           <a:effectLst/>
@@ -3763,6 +3793,9 @@
             <a:avLst/>
           </a:prstGeom>
           <a:noFill/>
+          <a:ln>
+            <a:solidFill/>
+          </a:ln>
         </p:spPr>
         <p:txBody>
           <a:bodyPr wrap="square" anchor="t" lIns="36576" rIns="36576" tIns="0" bIns="0">
@@ -3834,11 +3867,11 @@
             <a:avLst/>
           </a:prstGeom>
           <a:solidFill>
-            <a:srgbClr val="ECF2FB"/>
+            <a:srgbClr val="CFE0FA"/>
           </a:solidFill>
           <a:ln w="15875">
             <a:solidFill>
-              <a:srgbClr val="266EBE"/>
+              <a:srgbClr val="1B5FB0"/>
             </a:solidFill>
           </a:ln>
           <a:effectLst/>
@@ -3889,6 +3922,9 @@
             <a:avLst/>
           </a:prstGeom>
           <a:noFill/>
+          <a:ln>
+            <a:solidFill/>
+          </a:ln>
         </p:spPr>
         <p:txBody>
           <a:bodyPr wrap="square" anchor="t" lIns="36576" rIns="36576" tIns="0" bIns="0">
@@ -3960,11 +3996,11 @@
             <a:avLst/>
           </a:prstGeom>
           <a:solidFill>
-            <a:srgbClr val="ECF2FB"/>
+            <a:srgbClr val="CFE0FA"/>
           </a:solidFill>
           <a:ln w="15875">
             <a:solidFill>
-              <a:srgbClr val="266EBE"/>
+              <a:srgbClr val="1B5FB0"/>
             </a:solidFill>
           </a:ln>
           <a:effectLst/>
@@ -4015,6 +4051,9 @@
             <a:avLst/>
           </a:prstGeom>
           <a:noFill/>
+          <a:ln>
+            <a:solidFill/>
+          </a:ln>
         </p:spPr>
         <p:txBody>
           <a:bodyPr wrap="square" anchor="t" lIns="36576" rIns="36576" tIns="0" bIns="0">
@@ -4086,11 +4125,11 @@
             <a:avLst/>
           </a:prstGeom>
           <a:solidFill>
-            <a:srgbClr val="ECF2FB"/>
+            <a:srgbClr val="CFE0FA"/>
           </a:solidFill>
           <a:ln w="15875">
             <a:solidFill>
-              <a:srgbClr val="266EBE"/>
+              <a:srgbClr val="1B5FB0"/>
             </a:solidFill>
           </a:ln>
           <a:effectLst/>
@@ -4141,6 +4180,9 @@
             <a:avLst/>
           </a:prstGeom>
           <a:noFill/>
+          <a:ln>
+            <a:solidFill/>
+          </a:ln>
         </p:spPr>
         <p:txBody>
           <a:bodyPr wrap="square" anchor="t" lIns="36576" rIns="36576" tIns="0" bIns="0">
@@ -4176,6 +4218,9 @@
             <a:avLst/>
           </a:prstGeom>
           <a:noFill/>
+          <a:ln>
+            <a:solidFill/>
+          </a:ln>
         </p:spPr>
         <p:txBody>
           <a:bodyPr wrap="square" anchor="t" lIns="36576" rIns="36576" tIns="0" bIns="0">
@@ -4211,11 +4256,11 @@
             <a:avLst/>
           </a:prstGeom>
           <a:solidFill>
-            <a:srgbClr val="ECF2FB"/>
+            <a:srgbClr val="CFE0FA"/>
           </a:solidFill>
           <a:ln w="15875">
             <a:solidFill>
-              <a:srgbClr val="266EBE"/>
+              <a:srgbClr val="1B5FB0"/>
             </a:solidFill>
           </a:ln>
           <a:effectLst/>
@@ -4266,6 +4311,9 @@
             <a:avLst/>
           </a:prstGeom>
           <a:noFill/>
+          <a:ln>
+            <a:solidFill/>
+          </a:ln>
         </p:spPr>
         <p:txBody>
           <a:bodyPr wrap="square" anchor="t" lIns="36576" rIns="36576" tIns="0" bIns="0">
@@ -4301,11 +4349,11 @@
             <a:avLst/>
           </a:prstGeom>
           <a:solidFill>
-            <a:srgbClr val="ECF2FB"/>
+            <a:srgbClr val="CFE0FA"/>
           </a:solidFill>
           <a:ln w="15875">
             <a:solidFill>
-              <a:srgbClr val="266EBE"/>
+              <a:srgbClr val="1B5FB0"/>
             </a:solidFill>
           </a:ln>
           <a:effectLst/>
@@ -4356,6 +4404,9 @@
             <a:avLst/>
           </a:prstGeom>
           <a:noFill/>
+          <a:ln>
+            <a:solidFill/>
+          </a:ln>
         </p:spPr>
         <p:txBody>
           <a:bodyPr wrap="square" anchor="t" lIns="36576" rIns="36576" tIns="0" bIns="0">
@@ -4391,11 +4442,11 @@
             <a:avLst/>
           </a:prstGeom>
           <a:solidFill>
-            <a:srgbClr val="ECF2FB"/>
+            <a:srgbClr val="CFE0FA"/>
           </a:solidFill>
           <a:ln w="15875">
             <a:solidFill>
-              <a:srgbClr val="266EBE"/>
+              <a:srgbClr val="1B5FB0"/>
             </a:solidFill>
           </a:ln>
           <a:effectLst/>
@@ -4446,6 +4497,9 @@
             <a:avLst/>
           </a:prstGeom>
           <a:noFill/>
+          <a:ln>
+            <a:solidFill/>
+          </a:ln>
         </p:spPr>
         <p:txBody>
           <a:bodyPr wrap="square" anchor="t" lIns="36576" rIns="36576" tIns="0" bIns="0">
@@ -4481,6 +4535,9 @@
             <a:avLst/>
           </a:prstGeom>
           <a:noFill/>
+          <a:ln>
+            <a:solidFill/>
+          </a:ln>
         </p:spPr>
         <p:txBody>
           <a:bodyPr wrap="square" anchor="t" lIns="36576" rIns="36576" tIns="0" bIns="0">
@@ -4516,11 +4573,11 @@
             <a:avLst/>
           </a:prstGeom>
           <a:solidFill>
-            <a:srgbClr val="ECF2FB"/>
+            <a:srgbClr val="CFE0FA"/>
           </a:solidFill>
           <a:ln w="15875">
             <a:solidFill>
-              <a:srgbClr val="266EBE"/>
+              <a:srgbClr val="1B5FB0"/>
             </a:solidFill>
           </a:ln>
           <a:effectLst/>
@@ -4571,6 +4628,9 @@
             <a:avLst/>
           </a:prstGeom>
           <a:noFill/>
+          <a:ln>
+            <a:solidFill/>
+          </a:ln>
         </p:spPr>
         <p:txBody>
           <a:bodyPr wrap="square" anchor="t" lIns="36576" rIns="36576" tIns="0" bIns="0">
@@ -4606,11 +4666,11 @@
             <a:avLst/>
           </a:prstGeom>
           <a:solidFill>
-            <a:srgbClr val="ECF2FB"/>
+            <a:srgbClr val="CFE0FA"/>
           </a:solidFill>
           <a:ln w="15875">
             <a:solidFill>
-              <a:srgbClr val="266EBE"/>
+              <a:srgbClr val="1B5FB0"/>
             </a:solidFill>
           </a:ln>
           <a:effectLst/>
@@ -4661,6 +4721,9 @@
             <a:avLst/>
           </a:prstGeom>
           <a:noFill/>
+          <a:ln>
+            <a:solidFill/>
+          </a:ln>
         </p:spPr>
         <p:txBody>
           <a:bodyPr wrap="square" anchor="t" lIns="36576" rIns="36576" tIns="0" bIns="0">
@@ -4696,6 +4759,9 @@
             <a:avLst/>
           </a:prstGeom>
           <a:noFill/>
+          <a:ln>
+            <a:solidFill/>
+          </a:ln>
         </p:spPr>
         <p:txBody>
           <a:bodyPr wrap="square" anchor="t" lIns="36576" rIns="36576" tIns="0" bIns="0">
@@ -4731,11 +4797,11 @@
             <a:avLst/>
           </a:prstGeom>
           <a:solidFill>
-            <a:srgbClr val="ECF2FB"/>
+            <a:srgbClr val="CFE0FA"/>
           </a:solidFill>
           <a:ln w="15875">
             <a:solidFill>
-              <a:srgbClr val="266EBE"/>
+              <a:srgbClr val="1B5FB0"/>
             </a:solidFill>
           </a:ln>
           <a:effectLst/>
@@ -4786,6 +4852,9 @@
             <a:avLst/>
           </a:prstGeom>
           <a:noFill/>
+          <a:ln>
+            <a:solidFill/>
+          </a:ln>
         </p:spPr>
         <p:txBody>
           <a:bodyPr wrap="square" anchor="t" lIns="36576" rIns="36576" tIns="0" bIns="0">
@@ -4821,6 +4890,9 @@
             <a:avLst/>
           </a:prstGeom>
           <a:noFill/>
+          <a:ln>
+            <a:solidFill/>
+          </a:ln>
         </p:spPr>
         <p:txBody>
           <a:bodyPr wrap="square" anchor="t" lIns="36576" rIns="36576" tIns="0" bIns="0">
@@ -4856,11 +4928,11 @@
             <a:avLst/>
           </a:prstGeom>
           <a:solidFill>
-            <a:srgbClr val="ECF2FB"/>
+            <a:srgbClr val="CFE0FA"/>
           </a:solidFill>
           <a:ln w="15875">
             <a:solidFill>
-              <a:srgbClr val="266EBE"/>
+              <a:srgbClr val="1B5FB0"/>
             </a:solidFill>
           </a:ln>
           <a:effectLst/>
@@ -4911,6 +4983,9 @@
             <a:avLst/>
           </a:prstGeom>
           <a:noFill/>
+          <a:ln>
+            <a:solidFill/>
+          </a:ln>
         </p:spPr>
         <p:txBody>
           <a:bodyPr wrap="square" anchor="t" lIns="36576" rIns="36576" tIns="0" bIns="0">
@@ -4946,11 +5021,11 @@
             <a:avLst/>
           </a:prstGeom>
           <a:solidFill>
-            <a:srgbClr val="ECF2FB"/>
+            <a:srgbClr val="CFE0FA"/>
           </a:solidFill>
           <a:ln w="15875">
             <a:solidFill>
-              <a:srgbClr val="266EBE"/>
+              <a:srgbClr val="1B5FB0"/>
             </a:solidFill>
           </a:ln>
           <a:effectLst/>
@@ -5001,6 +5076,9 @@
             <a:avLst/>
           </a:prstGeom>
           <a:noFill/>
+          <a:ln>
+            <a:solidFill/>
+          </a:ln>
         </p:spPr>
         <p:txBody>
           <a:bodyPr wrap="square" anchor="t" lIns="36576" rIns="36576" tIns="0" bIns="0">
@@ -5036,6 +5114,9 @@
             <a:avLst/>
           </a:prstGeom>
           <a:noFill/>
+          <a:ln>
+            <a:solidFill/>
+          </a:ln>
         </p:spPr>
         <p:txBody>
           <a:bodyPr wrap="square" anchor="t" lIns="36576" rIns="36576" tIns="0" bIns="0">
@@ -5071,6 +5152,9 @@
             <a:avLst/>
           </a:prstGeom>
           <a:noFill/>
+          <a:ln>
+            <a:solidFill/>
+          </a:ln>
         </p:spPr>
         <p:txBody>
           <a:bodyPr wrap="square" anchor="t" lIns="36576" rIns="36576" tIns="0" bIns="0">
@@ -5130,6 +5214,9 @@
             <a:avLst/>
           </a:prstGeom>
           <a:noFill/>
+          <a:ln>
+            <a:solidFill/>
+          </a:ln>
         </p:spPr>
         <p:txBody>
           <a:bodyPr wrap="square" anchor="t" lIns="36576" rIns="36576" tIns="0" bIns="0">
@@ -5165,6 +5252,9 @@
             <a:avLst/>
           </a:prstGeom>
           <a:noFill/>
+          <a:ln>
+            <a:solidFill/>
+          </a:ln>
         </p:spPr>
         <p:txBody>
           <a:bodyPr wrap="square" anchor="t" lIns="36576" rIns="36576" tIns="0" bIns="0">
@@ -5218,6 +5308,9 @@
             <a:avLst/>
           </a:prstGeom>
           <a:noFill/>
+          <a:ln>
+            <a:solidFill/>
+          </a:ln>
         </p:spPr>
         <p:txBody>
           <a:bodyPr wrap="square" anchor="ctr" lIns="36576" rIns="36576" tIns="0" bIns="0">
@@ -5253,6 +5346,9 @@
             <a:avLst/>
           </a:prstGeom>
           <a:noFill/>
+          <a:ln>
+            <a:solidFill/>
+          </a:ln>
         </p:spPr>
         <p:txBody>
           <a:bodyPr wrap="square" anchor="t" lIns="36576" rIns="36576" tIns="0" bIns="0">
@@ -5288,11 +5384,11 @@
             <a:avLst/>
           </a:prstGeom>
           <a:solidFill>
-            <a:srgbClr val="ECF2FB"/>
+            <a:srgbClr val="CFE0FA"/>
           </a:solidFill>
           <a:ln w="12700">
             <a:solidFill>
-              <a:srgbClr val="266EBE"/>
+              <a:srgbClr val="1B5FB0"/>
             </a:solidFill>
           </a:ln>
           <a:effectLst/>
@@ -5334,6 +5430,9 @@
             <a:avLst/>
           </a:prstGeom>
           <a:noFill/>
+          <a:ln>
+            <a:solidFill/>
+          </a:ln>
         </p:spPr>
         <p:txBody>
           <a:bodyPr wrap="square" anchor="t" lIns="36576" rIns="36576" tIns="0" bIns="0">
@@ -5369,11 +5468,11 @@
             <a:avLst/>
           </a:prstGeom>
           <a:solidFill>
-            <a:srgbClr val="ECF6EF"/>
+            <a:srgbClr val="D4F0D8"/>
           </a:solidFill>
           <a:ln w="12700">
             <a:solidFill>
-              <a:srgbClr val="2E864B"/>
+              <a:srgbClr val="23794A"/>
             </a:solidFill>
           </a:ln>
           <a:effectLst/>
@@ -5415,6 +5514,9 @@
             <a:avLst/>
           </a:prstGeom>
           <a:noFill/>
+          <a:ln>
+            <a:solidFill/>
+          </a:ln>
         </p:spPr>
         <p:txBody>
           <a:bodyPr wrap="square" anchor="t" lIns="36576" rIns="36576" tIns="0" bIns="0">
@@ -5450,11 +5552,11 @@
             <a:avLst/>
           </a:prstGeom>
           <a:solidFill>
-            <a:srgbClr val="FBF4E8"/>
+            <a:srgbClr val="FDE3BF"/>
           </a:solidFill>
           <a:ln w="12700">
             <a:solidFill>
-              <a:srgbClr val="C87A0E"/>
+              <a:srgbClr val="B5720A"/>
             </a:solidFill>
           </a:ln>
           <a:effectLst/>
@@ -5496,6 +5598,9 @@
             <a:avLst/>
           </a:prstGeom>
           <a:noFill/>
+          <a:ln>
+            <a:solidFill/>
+          </a:ln>
         </p:spPr>
         <p:txBody>
           <a:bodyPr wrap="square" anchor="t" lIns="36576" rIns="36576" tIns="0" bIns="0">
@@ -5531,11 +5636,11 @@
             <a:avLst/>
           </a:prstGeom>
           <a:solidFill>
-            <a:srgbClr val="EAF4F6"/>
+            <a:srgbClr val="E8DAF6"/>
           </a:solidFill>
           <a:ln w="12700">
             <a:solidFill>
-              <a:srgbClr val="1F7A8C"/>
+              <a:srgbClr val="6B3FA0"/>
             </a:solidFill>
           </a:ln>
           <a:effectLst/>
@@ -5577,6 +5682,9 @@
             <a:avLst/>
           </a:prstGeom>
           <a:noFill/>
+          <a:ln>
+            <a:solidFill/>
+          </a:ln>
         </p:spPr>
         <p:txBody>
           <a:bodyPr wrap="square" anchor="t" lIns="36576" rIns="36576" tIns="0" bIns="0">
@@ -5612,11 +5720,11 @@
             <a:avLst/>
           </a:prstGeom>
           <a:solidFill>
-            <a:srgbClr val="EAF4F6"/>
+            <a:srgbClr val="E8DAF6"/>
           </a:solidFill>
           <a:ln w="15875">
             <a:solidFill>
-              <a:srgbClr val="1F7A8C"/>
+              <a:srgbClr val="6B3FA0"/>
             </a:solidFill>
           </a:ln>
           <a:effectLst/>
@@ -5715,11 +5823,11 @@
             <a:avLst/>
           </a:prstGeom>
           <a:solidFill>
-            <a:srgbClr val="EAF4F6"/>
+            <a:srgbClr val="E8DAF6"/>
           </a:solidFill>
           <a:ln w="15875">
             <a:solidFill>
-              <a:srgbClr val="1F7A8C"/>
+              <a:srgbClr val="6B3FA0"/>
             </a:solidFill>
           </a:ln>
           <a:effectLst/>
@@ -5818,11 +5926,11 @@
             <a:avLst/>
           </a:prstGeom>
           <a:solidFill>
-            <a:srgbClr val="EAF4F6"/>
+            <a:srgbClr val="E8DAF6"/>
           </a:solidFill>
           <a:ln w="15875">
             <a:solidFill>
-              <a:srgbClr val="1F7A8C"/>
+              <a:srgbClr val="6B3FA0"/>
             </a:solidFill>
           </a:ln>
           <a:effectLst/>
@@ -5921,11 +6029,11 @@
             <a:avLst/>
           </a:prstGeom>
           <a:solidFill>
-            <a:srgbClr val="FBF4E8"/>
+            <a:srgbClr val="FDE3BF"/>
           </a:solidFill>
           <a:ln w="15875">
             <a:solidFill>
-              <a:srgbClr val="C87A0E"/>
+              <a:srgbClr val="B5720A"/>
             </a:solidFill>
           </a:ln>
           <a:effectLst/>
@@ -5988,11 +6096,11 @@
             <a:avLst/>
           </a:prstGeom>
           <a:solidFill>
-            <a:srgbClr val="FBF4E8"/>
+            <a:srgbClr val="FDE3BF"/>
           </a:solidFill>
           <a:ln w="15875">
             <a:solidFill>
-              <a:srgbClr val="C87A0E"/>
+              <a:srgbClr val="B5720A"/>
             </a:solidFill>
           </a:ln>
           <a:effectLst/>
@@ -6091,11 +6199,11 @@
             <a:avLst/>
           </a:prstGeom>
           <a:solidFill>
-            <a:srgbClr val="ECF6EF"/>
+            <a:srgbClr val="D4F0D8"/>
           </a:solidFill>
           <a:ln w="15875">
             <a:solidFill>
-              <a:srgbClr val="2E864B"/>
+              <a:srgbClr val="23794A"/>
             </a:solidFill>
           </a:ln>
           <a:effectLst/>
@@ -6194,11 +6302,11 @@
             <a:avLst/>
           </a:prstGeom>
           <a:solidFill>
-            <a:srgbClr val="ECF6EF"/>
+            <a:srgbClr val="D4F0D8"/>
           </a:solidFill>
           <a:ln w="15875">
             <a:solidFill>
-              <a:srgbClr val="2E864B"/>
+              <a:srgbClr val="23794A"/>
             </a:solidFill>
           </a:ln>
           <a:effectLst/>
@@ -6297,11 +6405,11 @@
             <a:avLst/>
           </a:prstGeom>
           <a:solidFill>
-            <a:srgbClr val="ECF2FB"/>
+            <a:srgbClr val="CFE0FA"/>
           </a:solidFill>
           <a:ln w="15875">
             <a:solidFill>
-              <a:srgbClr val="266EBE"/>
+              <a:srgbClr val="1B5FB0"/>
             </a:solidFill>
           </a:ln>
           <a:effectLst/>
@@ -6364,11 +6472,11 @@
             <a:avLst/>
           </a:prstGeom>
           <a:solidFill>
-            <a:srgbClr val="ECF2FB"/>
+            <a:srgbClr val="CFE0FA"/>
           </a:solidFill>
           <a:ln w="15875">
             <a:solidFill>
-              <a:srgbClr val="266EBE"/>
+              <a:srgbClr val="1B5FB0"/>
             </a:solidFill>
           </a:ln>
           <a:effectLst/>
@@ -6467,11 +6575,11 @@
             <a:avLst/>
           </a:prstGeom>
           <a:solidFill>
-            <a:srgbClr val="ECF2FB"/>
+            <a:srgbClr val="CFE0FA"/>
           </a:solidFill>
           <a:ln w="15875">
             <a:solidFill>
-              <a:srgbClr val="266EBE"/>
+              <a:srgbClr val="1B5FB0"/>
             </a:solidFill>
           </a:ln>
           <a:effectLst/>
@@ -6570,11 +6678,11 @@
             <a:avLst/>
           </a:prstGeom>
           <a:solidFill>
-            <a:srgbClr val="ECF6EF"/>
+            <a:srgbClr val="D4F0D8"/>
           </a:solidFill>
           <a:ln w="15875">
             <a:solidFill>
-              <a:srgbClr val="2E864B"/>
+              <a:srgbClr val="23794A"/>
             </a:solidFill>
           </a:ln>
           <a:effectLst/>
@@ -6673,11 +6781,11 @@
             <a:avLst/>
           </a:prstGeom>
           <a:solidFill>
-            <a:srgbClr val="ECF6EF"/>
+            <a:srgbClr val="D4F0D8"/>
           </a:solidFill>
           <a:ln w="15875">
             <a:solidFill>
-              <a:srgbClr val="2E864B"/>
+              <a:srgbClr val="23794A"/>
             </a:solidFill>
           </a:ln>
           <a:effectLst/>
@@ -6831,6 +6939,9 @@
             <a:avLst/>
           </a:prstGeom>
           <a:noFill/>
+          <a:ln>
+            <a:solidFill/>
+          </a:ln>
         </p:spPr>
         <p:txBody>
           <a:bodyPr wrap="square" anchor="t" lIns="36576" rIns="36576" tIns="0" bIns="0">
@@ -6866,6 +6977,9 @@
             <a:avLst/>
           </a:prstGeom>
           <a:noFill/>
+          <a:ln>
+            <a:solidFill/>
+          </a:ln>
         </p:spPr>
         <p:txBody>
           <a:bodyPr wrap="square" anchor="t" lIns="36576" rIns="36576" tIns="0" bIns="0">
@@ -6919,6 +7033,9 @@
             <a:avLst/>
           </a:prstGeom>
           <a:noFill/>
+          <a:ln>
+            <a:solidFill/>
+          </a:ln>
         </p:spPr>
         <p:txBody>
           <a:bodyPr wrap="square" anchor="ctr" lIns="36576" rIns="36576" tIns="0" bIns="0">
@@ -6954,6 +7071,9 @@
             <a:avLst/>
           </a:prstGeom>
           <a:noFill/>
+          <a:ln>
+            <a:solidFill/>
+          </a:ln>
         </p:spPr>
         <p:txBody>
           <a:bodyPr wrap="square" anchor="t" lIns="36576" rIns="36576" tIns="0" bIns="0">
@@ -7044,6 +7164,9 @@
             <a:avLst/>
           </a:prstGeom>
           <a:noFill/>
+          <a:ln>
+            <a:solidFill/>
+          </a:ln>
         </p:spPr>
         <p:txBody>
           <a:bodyPr wrap="square" anchor="t" lIns="36576" rIns="36576" tIns="0" bIns="0">
@@ -7170,6 +7293,9 @@
             <a:avLst/>
           </a:prstGeom>
           <a:noFill/>
+          <a:ln>
+            <a:solidFill/>
+          </a:ln>
         </p:spPr>
         <p:txBody>
           <a:bodyPr wrap="square" anchor="t" lIns="36576" rIns="36576" tIns="0" bIns="0">
@@ -7296,6 +7422,9 @@
             <a:avLst/>
           </a:prstGeom>
           <a:noFill/>
+          <a:ln>
+            <a:solidFill/>
+          </a:ln>
         </p:spPr>
         <p:txBody>
           <a:bodyPr wrap="square" anchor="t" lIns="36576" rIns="36576" tIns="0" bIns="0">
@@ -7371,7 +7500,7 @@
           </a:solidFill>
           <a:ln w="15875">
             <a:solidFill>
-              <a:srgbClr val="2E864B"/>
+              <a:srgbClr val="23794A"/>
             </a:solidFill>
           </a:ln>
           <a:effectLst/>
@@ -7422,6 +7551,9 @@
             <a:avLst/>
           </a:prstGeom>
           <a:noFill/>
+          <a:ln>
+            <a:solidFill/>
+          </a:ln>
         </p:spPr>
         <p:txBody>
           <a:bodyPr wrap="square" anchor="t" lIns="36576" rIns="36576" tIns="0" bIns="0">
@@ -7497,7 +7629,7 @@
           </a:solidFill>
           <a:ln w="15875">
             <a:solidFill>
-              <a:srgbClr val="2E864B"/>
+              <a:srgbClr val="23794A"/>
             </a:solidFill>
           </a:ln>
           <a:effectLst/>
@@ -7548,6 +7680,9 @@
             <a:avLst/>
           </a:prstGeom>
           <a:noFill/>
+          <a:ln>
+            <a:solidFill/>
+          </a:ln>
         </p:spPr>
         <p:txBody>
           <a:bodyPr wrap="square" anchor="t" lIns="36576" rIns="36576" tIns="0" bIns="0">
@@ -7623,7 +7758,7 @@
           </a:solidFill>
           <a:ln w="15875">
             <a:solidFill>
-              <a:srgbClr val="C87A0E"/>
+              <a:srgbClr val="B5720A"/>
             </a:solidFill>
           </a:ln>
           <a:effectLst/>
@@ -7674,6 +7809,9 @@
             <a:avLst/>
           </a:prstGeom>
           <a:noFill/>
+          <a:ln>
+            <a:solidFill/>
+          </a:ln>
         </p:spPr>
         <p:txBody>
           <a:bodyPr wrap="square" anchor="t" lIns="36576" rIns="36576" tIns="0" bIns="0">
@@ -7749,7 +7887,7 @@
           </a:solidFill>
           <a:ln w="15875">
             <a:solidFill>
-              <a:srgbClr val="C87A0E"/>
+              <a:srgbClr val="B5720A"/>
             </a:solidFill>
           </a:ln>
           <a:effectLst/>
@@ -7800,6 +7938,9 @@
             <a:avLst/>
           </a:prstGeom>
           <a:noFill/>
+          <a:ln>
+            <a:solidFill/>
+          </a:ln>
         </p:spPr>
         <p:txBody>
           <a:bodyPr wrap="square" anchor="t" lIns="36576" rIns="36576" tIns="0" bIns="0">
@@ -7875,7 +8016,7 @@
           </a:solidFill>
           <a:ln w="15875">
             <a:solidFill>
-              <a:srgbClr val="266EBE"/>
+              <a:srgbClr val="1B5FB0"/>
             </a:solidFill>
           </a:ln>
           <a:effectLst/>
@@ -7926,6 +8067,9 @@
             <a:avLst/>
           </a:prstGeom>
           <a:noFill/>
+          <a:ln>
+            <a:solidFill/>
+          </a:ln>
         </p:spPr>
         <p:txBody>
           <a:bodyPr wrap="square" anchor="t" lIns="36576" rIns="36576" tIns="0" bIns="0">
@@ -7961,6 +8105,9 @@
             <a:avLst/>
           </a:prstGeom>
           <a:noFill/>
+          <a:ln>
+            <a:solidFill/>
+          </a:ln>
         </p:spPr>
         <p:txBody>
           <a:bodyPr wrap="square" anchor="t" lIns="36576" rIns="36576" tIns="0" bIns="0">
@@ -7996,6 +8143,9 @@
             <a:avLst/>
           </a:prstGeom>
           <a:noFill/>
+          <a:ln>
+            <a:solidFill/>
+          </a:ln>
         </p:spPr>
         <p:txBody>
           <a:bodyPr wrap="square" anchor="t" lIns="36576" rIns="36576" tIns="0" bIns="0">
@@ -8031,6 +8181,9 @@
             <a:avLst/>
           </a:prstGeom>
           <a:noFill/>
+          <a:ln>
+            <a:solidFill/>
+          </a:ln>
         </p:spPr>
         <p:txBody>
           <a:bodyPr wrap="square" anchor="t" lIns="36576" rIns="36576" tIns="0" bIns="0">
@@ -8084,6 +8237,9 @@
             <a:avLst/>
           </a:prstGeom>
           <a:noFill/>
+          <a:ln>
+            <a:solidFill/>
+          </a:ln>
         </p:spPr>
         <p:txBody>
           <a:bodyPr wrap="square" anchor="ctr" lIns="36576" rIns="36576" tIns="0" bIns="0">
@@ -8417,6 +8573,9 @@
             <a:avLst/>
           </a:prstGeom>
           <a:noFill/>
+          <a:ln>
+            <a:solidFill/>
+          </a:ln>
         </p:spPr>
         <p:txBody>
           <a:bodyPr wrap="square" anchor="t" lIns="36576" rIns="36576" tIns="0" bIns="0">
@@ -8452,6 +8611,9 @@
             <a:avLst/>
           </a:prstGeom>
           <a:noFill/>
+          <a:ln>
+            <a:solidFill/>
+          </a:ln>
         </p:spPr>
         <p:txBody>
           <a:bodyPr wrap="square" anchor="t" lIns="36576" rIns="36576" tIns="0" bIns="0">
@@ -8505,6 +8667,9 @@
             <a:avLst/>
           </a:prstGeom>
           <a:noFill/>
+          <a:ln>
+            <a:solidFill/>
+          </a:ln>
         </p:spPr>
         <p:txBody>
           <a:bodyPr wrap="square" anchor="ctr" lIns="36576" rIns="36576" tIns="0" bIns="0">
@@ -8540,6 +8705,9 @@
             <a:avLst/>
           </a:prstGeom>
           <a:noFill/>
+          <a:ln>
+            <a:solidFill/>
+          </a:ln>
         </p:spPr>
         <p:txBody>
           <a:bodyPr wrap="square" anchor="t" lIns="36576" rIns="36576" tIns="0" bIns="0">
@@ -8575,11 +8743,11 @@
             <a:avLst/>
           </a:prstGeom>
           <a:solidFill>
-            <a:srgbClr val="ECF2FB"/>
+            <a:srgbClr val="CFE0FA"/>
           </a:solidFill>
           <a:ln w="15875">
             <a:solidFill>
-              <a:srgbClr val="266EBE"/>
+              <a:srgbClr val="1B5FB0"/>
             </a:solidFill>
           </a:ln>
           <a:effectLst/>
@@ -8630,7 +8798,7 @@
             <a:r>
               <a:rPr sz="900" b="0">
                 <a:solidFill>
-                  <a:srgbClr val="266EBE"/>
+                  <a:srgbClr val="1B5FB0"/>
                 </a:solidFill>
                 <a:latin typeface="맑은 고딕"/>
               </a:rPr>
@@ -8642,7 +8810,7 @@
             <a:r>
               <a:rPr sz="900" b="0">
                 <a:solidFill>
-                  <a:srgbClr val="266EBE"/>
+                  <a:srgbClr val="1B5FB0"/>
                 </a:solidFill>
                 <a:latin typeface="맑은 고딕"/>
               </a:rPr>
@@ -8666,11 +8834,11 @@
             <a:avLst/>
           </a:prstGeom>
           <a:solidFill>
-            <a:srgbClr val="ECF6EF"/>
+            <a:srgbClr val="D4F0D8"/>
           </a:solidFill>
           <a:ln w="15875">
             <a:solidFill>
-              <a:srgbClr val="2E864B"/>
+              <a:srgbClr val="23794A"/>
             </a:solidFill>
           </a:ln>
           <a:effectLst/>
@@ -8721,7 +8889,7 @@
             <a:r>
               <a:rPr sz="900" b="0">
                 <a:solidFill>
-                  <a:srgbClr val="2E864B"/>
+                  <a:srgbClr val="23794A"/>
                 </a:solidFill>
                 <a:latin typeface="맑은 고딕"/>
               </a:rPr>
@@ -8757,11 +8925,11 @@
             <a:avLst/>
           </a:prstGeom>
           <a:solidFill>
-            <a:srgbClr val="FBF4E8"/>
+            <a:srgbClr val="FDE3BF"/>
           </a:solidFill>
           <a:ln w="15875">
             <a:solidFill>
-              <a:srgbClr val="C87A0E"/>
+              <a:srgbClr val="B5720A"/>
             </a:solidFill>
           </a:ln>
           <a:effectLst/>
@@ -8812,7 +8980,7 @@
             <a:r>
               <a:rPr sz="900" b="0">
                 <a:solidFill>
-                  <a:srgbClr val="C87A0E"/>
+                  <a:srgbClr val="B5720A"/>
                 </a:solidFill>
                 <a:latin typeface="맑은 고딕"/>
               </a:rPr>
@@ -8848,11 +9016,11 @@
             <a:avLst/>
           </a:prstGeom>
           <a:solidFill>
-            <a:srgbClr val="EAF4F6"/>
+            <a:srgbClr val="E8DAF6"/>
           </a:solidFill>
           <a:ln w="15875">
             <a:solidFill>
-              <a:srgbClr val="1F7A8C"/>
+              <a:srgbClr val="6B3FA0"/>
             </a:solidFill>
           </a:ln>
           <a:effectLst/>
@@ -8903,7 +9071,7 @@
             <a:r>
               <a:rPr sz="900" b="0">
                 <a:solidFill>
-                  <a:srgbClr val="1F7A8C"/>
+                  <a:srgbClr val="6B3FA0"/>
                 </a:solidFill>
                 <a:latin typeface="맑은 고딕"/>
               </a:rPr>
@@ -9366,6 +9534,9 @@
             <a:avLst/>
           </a:prstGeom>
           <a:noFill/>
+          <a:ln>
+            <a:solidFill/>
+          </a:ln>
         </p:spPr>
         <p:txBody>
           <a:bodyPr wrap="square" anchor="t" lIns="36576" rIns="36576" tIns="0" bIns="0">
@@ -9485,6 +9656,9 @@
             <a:avLst/>
           </a:prstGeom>
           <a:noFill/>
+          <a:ln>
+            <a:solidFill/>
+          </a:ln>
         </p:spPr>
         <p:txBody>
           <a:bodyPr wrap="square" anchor="t" lIns="36576" rIns="36576" tIns="0" bIns="0">
@@ -9520,7 +9694,7 @@
             <a:r>
               <a:rPr sz="1100" b="1">
                 <a:solidFill>
-                  <a:srgbClr val="2E864B"/>
+                  <a:srgbClr val="23794A"/>
                 </a:solidFill>
                 <a:latin typeface="맑은 고딕"/>
               </a:rPr>
@@ -9532,7 +9706,7 @@
             <a:r>
               <a:rPr sz="1100" b="1">
                 <a:solidFill>
-                  <a:srgbClr val="266EBE"/>
+                  <a:srgbClr val="1B5FB0"/>
                 </a:solidFill>
                 <a:latin typeface="맑은 고딕"/>
               </a:rPr>
@@ -9640,6 +9814,9 @@
             <a:avLst/>
           </a:prstGeom>
           <a:noFill/>
+          <a:ln>
+            <a:solidFill/>
+          </a:ln>
         </p:spPr>
         <p:txBody>
           <a:bodyPr wrap="square" anchor="t" lIns="36576" rIns="36576" tIns="0" bIns="0">
@@ -9675,6 +9852,9 @@
             <a:avLst/>
           </a:prstGeom>
           <a:noFill/>
+          <a:ln>
+            <a:solidFill/>
+          </a:ln>
         </p:spPr>
         <p:txBody>
           <a:bodyPr wrap="square" anchor="t" lIns="36576" rIns="36576" tIns="0" bIns="0">
@@ -9728,6 +9908,9 @@
             <a:avLst/>
           </a:prstGeom>
           <a:noFill/>
+          <a:ln>
+            <a:solidFill/>
+          </a:ln>
         </p:spPr>
         <p:txBody>
           <a:bodyPr wrap="square" anchor="ctr" lIns="36576" rIns="36576" tIns="0" bIns="0">
@@ -9763,6 +9946,9 @@
             <a:avLst/>
           </a:prstGeom>
           <a:noFill/>
+          <a:ln>
+            <a:solidFill/>
+          </a:ln>
         </p:spPr>
         <p:txBody>
           <a:bodyPr wrap="square" anchor="t" lIns="36576" rIns="36576" tIns="0" bIns="0">
@@ -9798,11 +9984,11 @@
             <a:avLst/>
           </a:prstGeom>
           <a:solidFill>
-            <a:srgbClr val="ECF2FB"/>
+            <a:srgbClr val="CFE0FA"/>
           </a:solidFill>
           <a:ln w="12700">
             <a:solidFill>
-              <a:srgbClr val="266EBE"/>
+              <a:srgbClr val="1B5FB0"/>
             </a:solidFill>
           </a:ln>
           <a:effectLst/>
@@ -9844,6 +10030,9 @@
             <a:avLst/>
           </a:prstGeom>
           <a:noFill/>
+          <a:ln>
+            <a:solidFill/>
+          </a:ln>
         </p:spPr>
         <p:txBody>
           <a:bodyPr wrap="square" anchor="t" lIns="36576" rIns="36576" tIns="0" bIns="0">
@@ -9879,11 +10068,11 @@
             <a:avLst/>
           </a:prstGeom>
           <a:solidFill>
-            <a:srgbClr val="ECF6EF"/>
+            <a:srgbClr val="D4F0D8"/>
           </a:solidFill>
           <a:ln w="12700">
             <a:solidFill>
-              <a:srgbClr val="2E864B"/>
+              <a:srgbClr val="23794A"/>
             </a:solidFill>
           </a:ln>
           <a:effectLst/>
@@ -9925,6 +10114,9 @@
             <a:avLst/>
           </a:prstGeom>
           <a:noFill/>
+          <a:ln>
+            <a:solidFill/>
+          </a:ln>
         </p:spPr>
         <p:txBody>
           <a:bodyPr wrap="square" anchor="t" lIns="36576" rIns="36576" tIns="0" bIns="0">
@@ -9960,11 +10152,11 @@
             <a:avLst/>
           </a:prstGeom>
           <a:solidFill>
-            <a:srgbClr val="FBF4E8"/>
+            <a:srgbClr val="FDE3BF"/>
           </a:solidFill>
           <a:ln w="12700">
             <a:solidFill>
-              <a:srgbClr val="C87A0E"/>
+              <a:srgbClr val="B5720A"/>
             </a:solidFill>
           </a:ln>
           <a:effectLst/>
@@ -10006,6 +10198,9 @@
             <a:avLst/>
           </a:prstGeom>
           <a:noFill/>
+          <a:ln>
+            <a:solidFill/>
+          </a:ln>
         </p:spPr>
         <p:txBody>
           <a:bodyPr wrap="square" anchor="t" lIns="36576" rIns="36576" tIns="0" bIns="0">
@@ -10041,11 +10236,11 @@
             <a:avLst/>
           </a:prstGeom>
           <a:solidFill>
-            <a:srgbClr val="EAF4F6"/>
+            <a:srgbClr val="E8DAF6"/>
           </a:solidFill>
           <a:ln w="12700">
             <a:solidFill>
-              <a:srgbClr val="1F7A8C"/>
+              <a:srgbClr val="6B3FA0"/>
             </a:solidFill>
           </a:ln>
           <a:effectLst/>
@@ -10087,6 +10282,9 @@
             <a:avLst/>
           </a:prstGeom>
           <a:noFill/>
+          <a:ln>
+            <a:solidFill/>
+          </a:ln>
         </p:spPr>
         <p:txBody>
           <a:bodyPr wrap="square" anchor="t" lIns="36576" rIns="36576" tIns="0" bIns="0">
@@ -10122,11 +10320,11 @@
             <a:avLst/>
           </a:prstGeom>
           <a:solidFill>
-            <a:srgbClr val="ECF2FB"/>
+            <a:srgbClr val="CFE0FA"/>
           </a:solidFill>
           <a:ln w="15875">
             <a:solidFill>
-              <a:srgbClr val="266EBE"/>
+              <a:srgbClr val="1B5FB0"/>
             </a:solidFill>
           </a:ln>
           <a:effectLst/>
@@ -10225,11 +10423,11 @@
             <a:avLst/>
           </a:prstGeom>
           <a:solidFill>
-            <a:srgbClr val="ECF2FB"/>
+            <a:srgbClr val="CFE0FA"/>
           </a:solidFill>
           <a:ln w="15875">
             <a:solidFill>
-              <a:srgbClr val="266EBE"/>
+              <a:srgbClr val="1B5FB0"/>
             </a:solidFill>
           </a:ln>
           <a:effectLst/>
@@ -10328,11 +10526,11 @@
             <a:avLst/>
           </a:prstGeom>
           <a:solidFill>
-            <a:srgbClr val="ECF2FB"/>
+            <a:srgbClr val="CFE0FA"/>
           </a:solidFill>
           <a:ln w="15875">
             <a:solidFill>
-              <a:srgbClr val="266EBE"/>
+              <a:srgbClr val="1B5FB0"/>
             </a:solidFill>
           </a:ln>
           <a:effectLst/>
@@ -10431,11 +10629,11 @@
             <a:avLst/>
           </a:prstGeom>
           <a:solidFill>
-            <a:srgbClr val="ECF2FB"/>
+            <a:srgbClr val="CFE0FA"/>
           </a:solidFill>
           <a:ln w="15875">
             <a:solidFill>
-              <a:srgbClr val="266EBE"/>
+              <a:srgbClr val="1B5FB0"/>
             </a:solidFill>
           </a:ln>
           <a:effectLst/>
@@ -10486,7 +10684,7 @@
             <a:r>
               <a:rPr sz="800" b="1">
                 <a:solidFill>
-                  <a:srgbClr val="266EBE"/>
+                  <a:srgbClr val="1B5FB0"/>
                 </a:solidFill>
                 <a:latin typeface="맑은 고딕"/>
               </a:rPr>
@@ -10546,11 +10744,11 @@
             <a:avLst/>
           </a:prstGeom>
           <a:solidFill>
-            <a:srgbClr val="ECF2FB"/>
+            <a:srgbClr val="CFE0FA"/>
           </a:solidFill>
           <a:ln w="15875">
             <a:solidFill>
-              <a:srgbClr val="266EBE"/>
+              <a:srgbClr val="1B5FB0"/>
             </a:solidFill>
           </a:ln>
           <a:effectLst/>
@@ -10649,11 +10847,11 @@
             <a:avLst/>
           </a:prstGeom>
           <a:solidFill>
-            <a:srgbClr val="ECF6EF"/>
+            <a:srgbClr val="D4F0D8"/>
           </a:solidFill>
           <a:ln w="15875">
             <a:solidFill>
-              <a:srgbClr val="2E864B"/>
+              <a:srgbClr val="23794A"/>
             </a:solidFill>
           </a:ln>
           <a:effectLst/>
@@ -10704,7 +10902,7 @@
             <a:r>
               <a:rPr sz="800" b="1">
                 <a:solidFill>
-                  <a:srgbClr val="2E864B"/>
+                  <a:srgbClr val="23794A"/>
                 </a:solidFill>
                 <a:latin typeface="맑은 고딕"/>
               </a:rPr>
@@ -10764,11 +10962,11 @@
             <a:avLst/>
           </a:prstGeom>
           <a:solidFill>
-            <a:srgbClr val="ECF6EF"/>
+            <a:srgbClr val="D4F0D8"/>
           </a:solidFill>
           <a:ln w="15875">
             <a:solidFill>
-              <a:srgbClr val="2E864B"/>
+              <a:srgbClr val="23794A"/>
             </a:solidFill>
           </a:ln>
           <a:effectLst/>
@@ -10819,7 +11017,7 @@
             <a:r>
               <a:rPr sz="800" b="1">
                 <a:solidFill>
-                  <a:srgbClr val="2E864B"/>
+                  <a:srgbClr val="23794A"/>
                 </a:solidFill>
                 <a:latin typeface="맑은 고딕"/>
               </a:rPr>
@@ -10843,11 +11041,11 @@
             <a:avLst/>
           </a:prstGeom>
           <a:solidFill>
-            <a:srgbClr val="FBF4E8"/>
+            <a:srgbClr val="FDE3BF"/>
           </a:solidFill>
           <a:ln w="15875">
             <a:solidFill>
-              <a:srgbClr val="C87A0E"/>
+              <a:srgbClr val="B5720A"/>
             </a:solidFill>
           </a:ln>
           <a:effectLst/>
@@ -10946,11 +11144,11 @@
             <a:avLst/>
           </a:prstGeom>
           <a:solidFill>
-            <a:srgbClr val="FBF4E8"/>
+            <a:srgbClr val="FDE3BF"/>
           </a:solidFill>
           <a:ln w="15875">
             <a:solidFill>
-              <a:srgbClr val="C87A0E"/>
+              <a:srgbClr val="B5720A"/>
             </a:solidFill>
           </a:ln>
           <a:effectLst/>
@@ -11049,11 +11247,11 @@
             <a:avLst/>
           </a:prstGeom>
           <a:solidFill>
-            <a:srgbClr val="ECF6EF"/>
+            <a:srgbClr val="D4F0D8"/>
           </a:solidFill>
           <a:ln w="15875">
             <a:solidFill>
-              <a:srgbClr val="2E864B"/>
+              <a:srgbClr val="23794A"/>
             </a:solidFill>
           </a:ln>
           <a:effectLst/>
@@ -11104,7 +11302,7 @@
             <a:r>
               <a:rPr sz="800" b="1">
                 <a:solidFill>
-                  <a:srgbClr val="2E864B"/>
+                  <a:srgbClr val="23794A"/>
                 </a:solidFill>
                 <a:latin typeface="맑은 고딕"/>
               </a:rPr>
@@ -11164,11 +11362,11 @@
             <a:avLst/>
           </a:prstGeom>
           <a:solidFill>
-            <a:srgbClr val="ECF6EF"/>
+            <a:srgbClr val="D4F0D8"/>
           </a:solidFill>
           <a:ln w="15875">
             <a:solidFill>
-              <a:srgbClr val="2E864B"/>
+              <a:srgbClr val="23794A"/>
             </a:solidFill>
           </a:ln>
           <a:effectLst/>
@@ -11267,11 +11465,11 @@
             <a:avLst/>
           </a:prstGeom>
           <a:solidFill>
-            <a:srgbClr val="ECF6EF"/>
+            <a:srgbClr val="D4F0D8"/>
           </a:solidFill>
           <a:ln w="15875">
             <a:solidFill>
-              <a:srgbClr val="2E864B"/>
+              <a:srgbClr val="23794A"/>
             </a:solidFill>
           </a:ln>
           <a:effectLst/>
@@ -11322,7 +11520,7 @@
             <a:r>
               <a:rPr sz="800" b="1">
                 <a:solidFill>
-                  <a:srgbClr val="2E864B"/>
+                  <a:srgbClr val="23794A"/>
                 </a:solidFill>
                 <a:latin typeface="맑은 고딕"/>
               </a:rPr>
@@ -11382,11 +11580,11 @@
             <a:avLst/>
           </a:prstGeom>
           <a:solidFill>
-            <a:srgbClr val="EAF4F6"/>
+            <a:srgbClr val="E8DAF6"/>
           </a:solidFill>
           <a:ln w="15875">
             <a:solidFill>
-              <a:srgbClr val="1F7A8C"/>
+              <a:srgbClr val="6B3FA0"/>
             </a:solidFill>
           </a:ln>
           <a:effectLst/>
@@ -11485,11 +11683,11 @@
             <a:avLst/>
           </a:prstGeom>
           <a:solidFill>
-            <a:srgbClr val="EAF4F6"/>
+            <a:srgbClr val="E8DAF6"/>
           </a:solidFill>
           <a:ln w="15875">
             <a:solidFill>
-              <a:srgbClr val="1F7A8C"/>
+              <a:srgbClr val="6B3FA0"/>
             </a:solidFill>
           </a:ln>
           <a:effectLst/>
@@ -11552,11 +11750,11 @@
             <a:avLst/>
           </a:prstGeom>
           <a:solidFill>
-            <a:srgbClr val="ECF6EF"/>
+            <a:srgbClr val="D4F0D8"/>
           </a:solidFill>
           <a:ln w="15875">
             <a:solidFill>
-              <a:srgbClr val="2E864B"/>
+              <a:srgbClr val="23794A"/>
             </a:solidFill>
           </a:ln>
           <a:effectLst/>
@@ -11607,7 +11805,7 @@
             <a:r>
               <a:rPr sz="800" b="1">
                 <a:solidFill>
-                  <a:srgbClr val="2E864B"/>
+                  <a:srgbClr val="23794A"/>
                 </a:solidFill>
                 <a:latin typeface="맑은 고딕"/>
               </a:rPr>
@@ -11667,11 +11865,11 @@
             <a:avLst/>
           </a:prstGeom>
           <a:solidFill>
-            <a:srgbClr val="ECF6EF"/>
+            <a:srgbClr val="D4F0D8"/>
           </a:solidFill>
           <a:ln w="15875">
             <a:solidFill>
-              <a:srgbClr val="2E864B"/>
+              <a:srgbClr val="23794A"/>
             </a:solidFill>
           </a:ln>
           <a:effectLst/>
@@ -11722,7 +11920,7 @@
             <a:r>
               <a:rPr sz="800" b="1">
                 <a:solidFill>
-                  <a:srgbClr val="2E864B"/>
+                  <a:srgbClr val="23794A"/>
                 </a:solidFill>
                 <a:latin typeface="맑은 고딕"/>
               </a:rPr>
@@ -11782,11 +11980,11 @@
             <a:avLst/>
           </a:prstGeom>
           <a:solidFill>
-            <a:srgbClr val="ECF6EF"/>
+            <a:srgbClr val="D4F0D8"/>
           </a:solidFill>
           <a:ln w="15875">
             <a:solidFill>
-              <a:srgbClr val="2E864B"/>
+              <a:srgbClr val="23794A"/>
             </a:solidFill>
           </a:ln>
           <a:effectLst/>
@@ -11837,7 +12035,7 @@
             <a:r>
               <a:rPr sz="800" b="1">
                 <a:solidFill>
-                  <a:srgbClr val="2E864B"/>
+                  <a:srgbClr val="23794A"/>
                 </a:solidFill>
                 <a:latin typeface="맑은 고딕"/>
               </a:rPr>
@@ -11897,11 +12095,11 @@
             <a:avLst/>
           </a:prstGeom>
           <a:solidFill>
-            <a:srgbClr val="EAF4F6"/>
+            <a:srgbClr val="E8DAF6"/>
           </a:solidFill>
           <a:ln w="15875">
             <a:solidFill>
-              <a:srgbClr val="1F7A8C"/>
+              <a:srgbClr val="6B3FA0"/>
             </a:solidFill>
           </a:ln>
           <a:effectLst/>
@@ -12000,11 +12198,11 @@
             <a:avLst/>
           </a:prstGeom>
           <a:solidFill>
-            <a:srgbClr val="ECF6EF"/>
+            <a:srgbClr val="D4F0D8"/>
           </a:solidFill>
           <a:ln w="15875">
             <a:solidFill>
-              <a:srgbClr val="2E864B"/>
+              <a:srgbClr val="23794A"/>
             </a:solidFill>
           </a:ln>
           <a:effectLst/>
@@ -12055,7 +12253,7 @@
             <a:r>
               <a:rPr sz="800" b="1">
                 <a:solidFill>
-                  <a:srgbClr val="2E864B"/>
+                  <a:srgbClr val="23794A"/>
                 </a:solidFill>
                 <a:latin typeface="맑은 고딕"/>
               </a:rPr>
@@ -12115,11 +12313,11 @@
             <a:avLst/>
           </a:prstGeom>
           <a:solidFill>
-            <a:srgbClr val="ECF2FB"/>
+            <a:srgbClr val="CFE0FA"/>
           </a:solidFill>
           <a:ln w="15875">
             <a:solidFill>
-              <a:srgbClr val="266EBE"/>
+              <a:srgbClr val="1B5FB0"/>
             </a:solidFill>
           </a:ln>
           <a:effectLst/>
@@ -12218,11 +12416,11 @@
             <a:avLst/>
           </a:prstGeom>
           <a:solidFill>
-            <a:srgbClr val="ECF2FB"/>
+            <a:srgbClr val="CFE0FA"/>
           </a:solidFill>
           <a:ln w="15875">
             <a:solidFill>
-              <a:srgbClr val="266EBE"/>
+              <a:srgbClr val="1B5FB0"/>
             </a:solidFill>
           </a:ln>
           <a:effectLst/>
@@ -12273,7 +12471,7 @@
             <a:r>
               <a:rPr sz="800" b="1">
                 <a:solidFill>
-                  <a:srgbClr val="266EBE"/>
+                  <a:srgbClr val="1B5FB0"/>
                 </a:solidFill>
                 <a:latin typeface="맑은 고딕"/>
               </a:rPr>
@@ -12297,6 +12495,9 @@
             <a:avLst/>
           </a:prstGeom>
           <a:noFill/>
+          <a:ln>
+            <a:solidFill/>
+          </a:ln>
         </p:spPr>
         <p:txBody>
           <a:bodyPr wrap="square" anchor="t" lIns="36576" rIns="36576" tIns="0" bIns="0">
@@ -12332,6 +12533,9 @@
             <a:avLst/>
           </a:prstGeom>
           <a:noFill/>
+          <a:ln>
+            <a:solidFill/>
+          </a:ln>
         </p:spPr>
         <p:txBody>
           <a:bodyPr wrap="square" anchor="t" lIns="36576" rIns="36576" tIns="0" bIns="0">
@@ -12385,6 +12589,9 @@
             <a:avLst/>
           </a:prstGeom>
           <a:noFill/>
+          <a:ln>
+            <a:solidFill/>
+          </a:ln>
         </p:spPr>
         <p:txBody>
           <a:bodyPr wrap="square" anchor="ctr" lIns="36576" rIns="36576" tIns="0" bIns="0">
@@ -12420,6 +12627,9 @@
             <a:avLst/>
           </a:prstGeom>
           <a:noFill/>
+          <a:ln>
+            <a:solidFill/>
+          </a:ln>
         </p:spPr>
         <p:txBody>
           <a:bodyPr wrap="square" anchor="t" lIns="36576" rIns="36576" tIns="0" bIns="0">
@@ -12455,11 +12665,11 @@
             <a:avLst/>
           </a:prstGeom>
           <a:solidFill>
-            <a:srgbClr val="ECF2FB"/>
+            <a:srgbClr val="CFE0FA"/>
           </a:solidFill>
           <a:ln w="12700">
             <a:solidFill>
-              <a:srgbClr val="266EBE"/>
+              <a:srgbClr val="1B5FB0"/>
             </a:solidFill>
           </a:ln>
           <a:effectLst/>
@@ -12501,6 +12711,9 @@
             <a:avLst/>
           </a:prstGeom>
           <a:noFill/>
+          <a:ln>
+            <a:solidFill/>
+          </a:ln>
         </p:spPr>
         <p:txBody>
           <a:bodyPr wrap="square" anchor="t" lIns="36576" rIns="36576" tIns="0" bIns="0">
@@ -12536,11 +12749,11 @@
             <a:avLst/>
           </a:prstGeom>
           <a:solidFill>
-            <a:srgbClr val="ECF6EF"/>
+            <a:srgbClr val="D4F0D8"/>
           </a:solidFill>
           <a:ln w="12700">
             <a:solidFill>
-              <a:srgbClr val="2E864B"/>
+              <a:srgbClr val="23794A"/>
             </a:solidFill>
           </a:ln>
           <a:effectLst/>
@@ -12582,6 +12795,9 @@
             <a:avLst/>
           </a:prstGeom>
           <a:noFill/>
+          <a:ln>
+            <a:solidFill/>
+          </a:ln>
         </p:spPr>
         <p:txBody>
           <a:bodyPr wrap="square" anchor="t" lIns="36576" rIns="36576" tIns="0" bIns="0">
@@ -12617,11 +12833,11 @@
             <a:avLst/>
           </a:prstGeom>
           <a:solidFill>
-            <a:srgbClr val="FBF4E8"/>
+            <a:srgbClr val="FDE3BF"/>
           </a:solidFill>
           <a:ln w="12700">
             <a:solidFill>
-              <a:srgbClr val="C87A0E"/>
+              <a:srgbClr val="B5720A"/>
             </a:solidFill>
           </a:ln>
           <a:effectLst/>
@@ -12663,6 +12879,9 @@
             <a:avLst/>
           </a:prstGeom>
           <a:noFill/>
+          <a:ln>
+            <a:solidFill/>
+          </a:ln>
         </p:spPr>
         <p:txBody>
           <a:bodyPr wrap="square" anchor="t" lIns="36576" rIns="36576" tIns="0" bIns="0">
@@ -12698,11 +12917,11 @@
             <a:avLst/>
           </a:prstGeom>
           <a:solidFill>
-            <a:srgbClr val="EAF4F6"/>
+            <a:srgbClr val="E8DAF6"/>
           </a:solidFill>
           <a:ln w="12700">
             <a:solidFill>
-              <a:srgbClr val="1F7A8C"/>
+              <a:srgbClr val="6B3FA0"/>
             </a:solidFill>
           </a:ln>
           <a:effectLst/>
@@ -12744,6 +12963,9 @@
             <a:avLst/>
           </a:prstGeom>
           <a:noFill/>
+          <a:ln>
+            <a:solidFill/>
+          </a:ln>
         </p:spPr>
         <p:txBody>
           <a:bodyPr wrap="square" anchor="t" lIns="36576" rIns="36576" tIns="0" bIns="0">
@@ -12779,11 +13001,11 @@
             <a:avLst/>
           </a:prstGeom>
           <a:solidFill>
-            <a:srgbClr val="ECF2FB"/>
+            <a:srgbClr val="CFE0FA"/>
           </a:solidFill>
           <a:ln w="15875">
             <a:solidFill>
-              <a:srgbClr val="266EBE"/>
+              <a:srgbClr val="1B5FB0"/>
             </a:solidFill>
           </a:ln>
           <a:effectLst/>
@@ -12882,11 +13104,11 @@
             <a:avLst/>
           </a:prstGeom>
           <a:solidFill>
-            <a:srgbClr val="ECF2FB"/>
+            <a:srgbClr val="CFE0FA"/>
           </a:solidFill>
           <a:ln w="15875">
             <a:solidFill>
-              <a:srgbClr val="266EBE"/>
+              <a:srgbClr val="1B5FB0"/>
             </a:solidFill>
           </a:ln>
           <a:effectLst/>
@@ -12937,7 +13159,7 @@
             <a:r>
               <a:rPr sz="800" b="1">
                 <a:solidFill>
-                  <a:srgbClr val="266EBE"/>
+                  <a:srgbClr val="1B5FB0"/>
                 </a:solidFill>
                 <a:latin typeface="맑은 고딕"/>
               </a:rPr>
@@ -12997,11 +13219,11 @@
             <a:avLst/>
           </a:prstGeom>
           <a:solidFill>
-            <a:srgbClr val="ECF6EF"/>
+            <a:srgbClr val="D4F0D8"/>
           </a:solidFill>
           <a:ln w="15875">
             <a:solidFill>
-              <a:srgbClr val="2E864B"/>
+              <a:srgbClr val="23794A"/>
             </a:solidFill>
           </a:ln>
           <a:effectLst/>
@@ -13052,7 +13274,7 @@
             <a:r>
               <a:rPr sz="800" b="1">
                 <a:solidFill>
-                  <a:srgbClr val="2E864B"/>
+                  <a:srgbClr val="23794A"/>
                 </a:solidFill>
                 <a:latin typeface="맑은 고딕"/>
               </a:rPr>
@@ -13112,11 +13334,11 @@
             <a:avLst/>
           </a:prstGeom>
           <a:solidFill>
-            <a:srgbClr val="ECF6EF"/>
+            <a:srgbClr val="D4F0D8"/>
           </a:solidFill>
           <a:ln w="15875">
             <a:solidFill>
-              <a:srgbClr val="2E864B"/>
+              <a:srgbClr val="23794A"/>
             </a:solidFill>
           </a:ln>
           <a:effectLst/>
@@ -13215,11 +13437,11 @@
             <a:avLst/>
           </a:prstGeom>
           <a:solidFill>
-            <a:srgbClr val="ECF6EF"/>
+            <a:srgbClr val="D4F0D8"/>
           </a:solidFill>
           <a:ln w="15875">
             <a:solidFill>
-              <a:srgbClr val="2E864B"/>
+              <a:srgbClr val="23794A"/>
             </a:solidFill>
           </a:ln>
           <a:effectLst/>
@@ -13318,11 +13540,11 @@
             <a:avLst/>
           </a:prstGeom>
           <a:solidFill>
-            <a:srgbClr val="ECF6EF"/>
+            <a:srgbClr val="D4F0D8"/>
           </a:solidFill>
           <a:ln w="15875">
             <a:solidFill>
-              <a:srgbClr val="2E864B"/>
+              <a:srgbClr val="23794A"/>
             </a:solidFill>
           </a:ln>
           <a:effectLst/>
@@ -13421,11 +13643,11 @@
             <a:avLst/>
           </a:prstGeom>
           <a:solidFill>
-            <a:srgbClr val="ECF6EF"/>
+            <a:srgbClr val="D4F0D8"/>
           </a:solidFill>
           <a:ln w="15875">
             <a:solidFill>
-              <a:srgbClr val="2E864B"/>
+              <a:srgbClr val="23794A"/>
             </a:solidFill>
           </a:ln>
           <a:effectLst/>
@@ -13476,7 +13698,7 @@
             <a:r>
               <a:rPr sz="800" b="1">
                 <a:solidFill>
-                  <a:srgbClr val="2E864B"/>
+                  <a:srgbClr val="23794A"/>
                 </a:solidFill>
                 <a:latin typeface="맑은 고딕"/>
               </a:rPr>
@@ -13500,11 +13722,11 @@
             <a:avLst/>
           </a:prstGeom>
           <a:solidFill>
-            <a:srgbClr val="EAF4F6"/>
+            <a:srgbClr val="E8DAF6"/>
           </a:solidFill>
           <a:ln w="15875">
             <a:solidFill>
-              <a:srgbClr val="1F7A8C"/>
+              <a:srgbClr val="6B3FA0"/>
             </a:solidFill>
           </a:ln>
           <a:effectLst/>
@@ -13603,11 +13825,11 @@
             <a:avLst/>
           </a:prstGeom>
           <a:solidFill>
-            <a:srgbClr val="EAF4F6"/>
+            <a:srgbClr val="E8DAF6"/>
           </a:solidFill>
           <a:ln w="15875">
             <a:solidFill>
-              <a:srgbClr val="1F7A8C"/>
+              <a:srgbClr val="6B3FA0"/>
             </a:solidFill>
           </a:ln>
           <a:effectLst/>
@@ -13706,11 +13928,11 @@
             <a:avLst/>
           </a:prstGeom>
           <a:solidFill>
-            <a:srgbClr val="ECF6EF"/>
+            <a:srgbClr val="D4F0D8"/>
           </a:solidFill>
           <a:ln w="15875">
             <a:solidFill>
-              <a:srgbClr val="2E864B"/>
+              <a:srgbClr val="23794A"/>
             </a:solidFill>
           </a:ln>
           <a:effectLst/>
@@ -13761,7 +13983,7 @@
             <a:r>
               <a:rPr sz="800" b="1">
                 <a:solidFill>
-                  <a:srgbClr val="2E864B"/>
+                  <a:srgbClr val="23794A"/>
                 </a:solidFill>
                 <a:latin typeface="맑은 고딕"/>
               </a:rPr>
@@ -13821,11 +14043,11 @@
             <a:avLst/>
           </a:prstGeom>
           <a:solidFill>
-            <a:srgbClr val="ECF2FB"/>
+            <a:srgbClr val="CFE0FA"/>
           </a:solidFill>
           <a:ln w="15875">
             <a:solidFill>
-              <a:srgbClr val="266EBE"/>
+              <a:srgbClr val="1B5FB0"/>
             </a:solidFill>
           </a:ln>
           <a:effectLst/>
@@ -13924,11 +14146,11 @@
             <a:avLst/>
           </a:prstGeom>
           <a:solidFill>
-            <a:srgbClr val="ECF6EF"/>
+            <a:srgbClr val="D4F0D8"/>
           </a:solidFill>
           <a:ln w="15875">
             <a:solidFill>
-              <a:srgbClr val="2E864B"/>
+              <a:srgbClr val="23794A"/>
             </a:solidFill>
           </a:ln>
           <a:effectLst/>
@@ -13979,7 +14201,7 @@
             <a:r>
               <a:rPr sz="800" b="1">
                 <a:solidFill>
-                  <a:srgbClr val="2E864B"/>
+                  <a:srgbClr val="23794A"/>
                 </a:solidFill>
                 <a:latin typeface="맑은 고딕"/>
               </a:rPr>
@@ -14039,11 +14261,11 @@
             <a:avLst/>
           </a:prstGeom>
           <a:solidFill>
-            <a:srgbClr val="ECF6EF"/>
+            <a:srgbClr val="D4F0D8"/>
           </a:solidFill>
           <a:ln w="15875">
             <a:solidFill>
-              <a:srgbClr val="2E864B"/>
+              <a:srgbClr val="23794A"/>
             </a:solidFill>
           </a:ln>
           <a:effectLst/>
@@ -14142,11 +14364,11 @@
             <a:avLst/>
           </a:prstGeom>
           <a:solidFill>
-            <a:srgbClr val="ECF6EF"/>
+            <a:srgbClr val="D4F0D8"/>
           </a:solidFill>
           <a:ln w="15875">
             <a:solidFill>
-              <a:srgbClr val="2E864B"/>
+              <a:srgbClr val="23794A"/>
             </a:solidFill>
           </a:ln>
           <a:effectLst/>
@@ -14197,7 +14419,7 @@
             <a:r>
               <a:rPr sz="800" b="1">
                 <a:solidFill>
-                  <a:srgbClr val="2E864B"/>
+                  <a:srgbClr val="23794A"/>
                 </a:solidFill>
                 <a:latin typeface="맑은 고딕"/>
               </a:rPr>
@@ -14221,11 +14443,11 @@
             <a:avLst/>
           </a:prstGeom>
           <a:solidFill>
-            <a:srgbClr val="EAF4F6"/>
+            <a:srgbClr val="E8DAF6"/>
           </a:solidFill>
           <a:ln w="15875">
             <a:solidFill>
-              <a:srgbClr val="1F7A8C"/>
+              <a:srgbClr val="6B3FA0"/>
             </a:solidFill>
           </a:ln>
           <a:effectLst/>
@@ -14324,11 +14546,11 @@
             <a:avLst/>
           </a:prstGeom>
           <a:solidFill>
-            <a:srgbClr val="ECF6EF"/>
+            <a:srgbClr val="D4F0D8"/>
           </a:solidFill>
           <a:ln w="15875">
             <a:solidFill>
-              <a:srgbClr val="2E864B"/>
+              <a:srgbClr val="23794A"/>
             </a:solidFill>
           </a:ln>
           <a:effectLst/>
@@ -14379,7 +14601,7 @@
             <a:r>
               <a:rPr sz="800" b="1">
                 <a:solidFill>
-                  <a:srgbClr val="2E864B"/>
+                  <a:srgbClr val="23794A"/>
                 </a:solidFill>
                 <a:latin typeface="맑은 고딕"/>
               </a:rPr>
@@ -14439,11 +14661,11 @@
             <a:avLst/>
           </a:prstGeom>
           <a:solidFill>
-            <a:srgbClr val="FBF4E8"/>
+            <a:srgbClr val="FDE3BF"/>
           </a:solidFill>
           <a:ln w="15875">
             <a:solidFill>
-              <a:srgbClr val="C87A0E"/>
+              <a:srgbClr val="B5720A"/>
             </a:solidFill>
           </a:ln>
           <a:effectLst/>
@@ -14542,11 +14764,11 @@
             <a:avLst/>
           </a:prstGeom>
           <a:solidFill>
-            <a:srgbClr val="ECF6EF"/>
+            <a:srgbClr val="D4F0D8"/>
           </a:solidFill>
           <a:ln w="15875">
             <a:solidFill>
-              <a:srgbClr val="2E864B"/>
+              <a:srgbClr val="23794A"/>
             </a:solidFill>
           </a:ln>
           <a:effectLst/>
@@ -14597,7 +14819,7 @@
             <a:r>
               <a:rPr sz="800" b="1">
                 <a:solidFill>
-                  <a:srgbClr val="2E864B"/>
+                  <a:srgbClr val="23794A"/>
                 </a:solidFill>
                 <a:latin typeface="맑은 고딕"/>
               </a:rPr>
@@ -14657,11 +14879,11 @@
             <a:avLst/>
           </a:prstGeom>
           <a:solidFill>
-            <a:srgbClr val="ECF2FB"/>
+            <a:srgbClr val="CFE0FA"/>
           </a:solidFill>
           <a:ln w="15875">
             <a:solidFill>
-              <a:srgbClr val="266EBE"/>
+              <a:srgbClr val="1B5FB0"/>
             </a:solidFill>
           </a:ln>
           <a:effectLst/>
@@ -14712,7 +14934,7 @@
             <a:r>
               <a:rPr sz="800" b="1">
                 <a:solidFill>
-                  <a:srgbClr val="266EBE"/>
+                  <a:srgbClr val="1B5FB0"/>
                 </a:solidFill>
                 <a:latin typeface="맑은 고딕"/>
               </a:rPr>
@@ -14772,11 +14994,11 @@
             <a:avLst/>
           </a:prstGeom>
           <a:solidFill>
-            <a:srgbClr val="ECF6EF"/>
+            <a:srgbClr val="D4F0D8"/>
           </a:solidFill>
           <a:ln w="15875">
             <a:solidFill>
-              <a:srgbClr val="2E864B"/>
+              <a:srgbClr val="23794A"/>
             </a:solidFill>
           </a:ln>
           <a:effectLst/>
@@ -14827,7 +15049,7 @@
             <a:r>
               <a:rPr sz="800" b="1">
                 <a:solidFill>
-                  <a:srgbClr val="2E864B"/>
+                  <a:srgbClr val="23794A"/>
                 </a:solidFill>
                 <a:latin typeface="맑은 고딕"/>
               </a:rPr>
@@ -14887,11 +15109,11 @@
             <a:avLst/>
           </a:prstGeom>
           <a:solidFill>
-            <a:srgbClr val="ECF2FB"/>
+            <a:srgbClr val="CFE0FA"/>
           </a:solidFill>
           <a:ln w="15875">
             <a:solidFill>
-              <a:srgbClr val="266EBE"/>
+              <a:srgbClr val="1B5FB0"/>
             </a:solidFill>
           </a:ln>
           <a:effectLst/>
@@ -14942,7 +15164,7 @@
             <a:r>
               <a:rPr sz="800" b="1">
                 <a:solidFill>
-                  <a:srgbClr val="266EBE"/>
+                  <a:srgbClr val="1B5FB0"/>
                 </a:solidFill>
                 <a:latin typeface="맑은 고딕"/>
               </a:rPr>
@@ -14966,6 +15188,9 @@
             <a:avLst/>
           </a:prstGeom>
           <a:noFill/>
+          <a:ln>
+            <a:solidFill/>
+          </a:ln>
         </p:spPr>
         <p:txBody>
           <a:bodyPr wrap="square" anchor="t" lIns="36576" rIns="36576" tIns="0" bIns="0">
@@ -15001,6 +15226,9 @@
             <a:avLst/>
           </a:prstGeom>
           <a:noFill/>
+          <a:ln>
+            <a:solidFill/>
+          </a:ln>
         </p:spPr>
         <p:txBody>
           <a:bodyPr wrap="square" anchor="t" lIns="36576" rIns="36576" tIns="0" bIns="0">
@@ -15054,6 +15282,9 @@
             <a:avLst/>
           </a:prstGeom>
           <a:noFill/>
+          <a:ln>
+            <a:solidFill/>
+          </a:ln>
         </p:spPr>
         <p:txBody>
           <a:bodyPr wrap="square" anchor="ctr" lIns="36576" rIns="36576" tIns="0" bIns="0">
@@ -15089,6 +15320,9 @@
             <a:avLst/>
           </a:prstGeom>
           <a:noFill/>
+          <a:ln>
+            <a:solidFill/>
+          </a:ln>
         </p:spPr>
         <p:txBody>
           <a:bodyPr wrap="square" anchor="t" lIns="36576" rIns="36576" tIns="0" bIns="0">
@@ -15128,7 +15362,7 @@
           </a:solidFill>
           <a:ln w="15875">
             <a:solidFill>
-              <a:srgbClr val="2E864B"/>
+              <a:srgbClr val="23794A"/>
             </a:solidFill>
           </a:ln>
           <a:effectLst/>
@@ -15179,6 +15413,9 @@
             <a:avLst/>
           </a:prstGeom>
           <a:noFill/>
+          <a:ln>
+            <a:solidFill/>
+          </a:ln>
         </p:spPr>
         <p:txBody>
           <a:bodyPr wrap="square" anchor="t" lIns="36576" rIns="36576" tIns="0" bIns="0">
@@ -15214,6 +15451,9 @@
             <a:avLst/>
           </a:prstGeom>
           <a:noFill/>
+          <a:ln>
+            <a:solidFill/>
+          </a:ln>
         </p:spPr>
         <p:txBody>
           <a:bodyPr wrap="square" anchor="t" lIns="36576" rIns="36576" tIns="0" bIns="0">
@@ -15253,7 +15493,7 @@
           </a:solidFill>
           <a:ln w="15875">
             <a:solidFill>
-              <a:srgbClr val="266EBE"/>
+              <a:srgbClr val="1B5FB0"/>
             </a:solidFill>
           </a:ln>
           <a:effectLst/>
@@ -15304,6 +15544,9 @@
             <a:avLst/>
           </a:prstGeom>
           <a:noFill/>
+          <a:ln>
+            <a:solidFill/>
+          </a:ln>
         </p:spPr>
         <p:txBody>
           <a:bodyPr wrap="square" anchor="t" lIns="36576" rIns="36576" tIns="0" bIns="0">
@@ -15339,6 +15582,9 @@
             <a:avLst/>
           </a:prstGeom>
           <a:noFill/>
+          <a:ln>
+            <a:solidFill/>
+          </a:ln>
         </p:spPr>
         <p:txBody>
           <a:bodyPr wrap="square" anchor="t" lIns="36576" rIns="36576" tIns="0" bIns="0">
@@ -15374,6 +15620,9 @@
             <a:avLst/>
           </a:prstGeom>
           <a:noFill/>
+          <a:ln>
+            <a:solidFill/>
+          </a:ln>
         </p:spPr>
         <p:txBody>
           <a:bodyPr wrap="square" anchor="t" lIns="36576" rIns="36576" tIns="0" bIns="0">
@@ -15409,6 +15658,9 @@
             <a:avLst/>
           </a:prstGeom>
           <a:noFill/>
+          <a:ln>
+            <a:solidFill/>
+          </a:ln>
         </p:spPr>
         <p:txBody>
           <a:bodyPr wrap="square" anchor="t" lIns="36576" rIns="36576" tIns="0" bIns="0">
@@ -15444,6 +15696,9 @@
             <a:avLst/>
           </a:prstGeom>
           <a:noFill/>
+          <a:ln>
+            <a:solidFill/>
+          </a:ln>
         </p:spPr>
         <p:txBody>
           <a:bodyPr wrap="square" anchor="t" lIns="36576" rIns="36576" tIns="0" bIns="0">
@@ -15479,6 +15734,9 @@
             <a:avLst/>
           </a:prstGeom>
           <a:noFill/>
+          <a:ln>
+            <a:solidFill/>
+          </a:ln>
         </p:spPr>
         <p:txBody>
           <a:bodyPr wrap="square" anchor="t" lIns="36576" rIns="36576" tIns="0" bIns="0">
@@ -15514,6 +15772,9 @@
             <a:avLst/>
           </a:prstGeom>
           <a:noFill/>
+          <a:ln>
+            <a:solidFill/>
+          </a:ln>
         </p:spPr>
         <p:txBody>
           <a:bodyPr wrap="square" anchor="t" lIns="36576" rIns="36576" tIns="0" bIns="0">
@@ -15549,6 +15810,9 @@
             <a:avLst/>
           </a:prstGeom>
           <a:noFill/>
+          <a:ln>
+            <a:solidFill/>
+          </a:ln>
         </p:spPr>
         <p:txBody>
           <a:bodyPr wrap="square" anchor="t" lIns="36576" rIns="36576" tIns="0" bIns="0">
@@ -15584,6 +15848,9 @@
             <a:avLst/>
           </a:prstGeom>
           <a:noFill/>
+          <a:ln>
+            <a:solidFill/>
+          </a:ln>
         </p:spPr>
         <p:txBody>
           <a:bodyPr wrap="square" anchor="t" lIns="36576" rIns="36576" tIns="0" bIns="0">
@@ -15619,6 +15886,9 @@
             <a:avLst/>
           </a:prstGeom>
           <a:noFill/>
+          <a:ln>
+            <a:solidFill/>
+          </a:ln>
         </p:spPr>
         <p:txBody>
           <a:bodyPr wrap="square" anchor="t" lIns="36576" rIns="36576" tIns="0" bIns="0">
@@ -15658,7 +15928,7 @@
           </a:solidFill>
           <a:ln w="15875">
             <a:solidFill>
-              <a:srgbClr val="1F7A8C"/>
+              <a:srgbClr val="6B3FA0"/>
             </a:solidFill>
           </a:ln>
           <a:effectLst/>
@@ -15709,6 +15979,9 @@
             <a:avLst/>
           </a:prstGeom>
           <a:noFill/>
+          <a:ln>
+            <a:solidFill/>
+          </a:ln>
         </p:spPr>
         <p:txBody>
           <a:bodyPr wrap="square" anchor="t" lIns="36576" rIns="36576" tIns="0" bIns="0">
@@ -15744,6 +16017,9 @@
             <a:avLst/>
           </a:prstGeom>
           <a:noFill/>
+          <a:ln>
+            <a:solidFill/>
+          </a:ln>
         </p:spPr>
         <p:txBody>
           <a:bodyPr wrap="square" anchor="t" lIns="36576" rIns="36576" tIns="0" bIns="0">
@@ -15779,6 +16055,9 @@
             <a:avLst/>
           </a:prstGeom>
           <a:noFill/>
+          <a:ln>
+            <a:solidFill/>
+          </a:ln>
         </p:spPr>
         <p:txBody>
           <a:bodyPr wrap="square" anchor="t" lIns="36576" rIns="36576" tIns="0" bIns="0">
@@ -15814,6 +16093,9 @@
             <a:avLst/>
           </a:prstGeom>
           <a:noFill/>
+          <a:ln>
+            <a:solidFill/>
+          </a:ln>
         </p:spPr>
         <p:txBody>
           <a:bodyPr wrap="square" anchor="t" lIns="36576" rIns="36576" tIns="0" bIns="0">
@@ -15980,7 +16262,7 @@
           </a:solidFill>
           <a:ln w="15875">
             <a:solidFill>
-              <a:srgbClr val="C87A0E"/>
+              <a:srgbClr val="B5720A"/>
             </a:solidFill>
           </a:ln>
           <a:effectLst/>
@@ -16031,6 +16313,9 @@
             <a:avLst/>
           </a:prstGeom>
           <a:noFill/>
+          <a:ln>
+            <a:solidFill/>
+          </a:ln>
         </p:spPr>
         <p:txBody>
           <a:bodyPr wrap="square" anchor="t" lIns="36576" rIns="36576" tIns="0" bIns="0">
@@ -16066,6 +16351,9 @@
             <a:avLst/>
           </a:prstGeom>
           <a:noFill/>
+          <a:ln>
+            <a:solidFill/>
+          </a:ln>
         </p:spPr>
         <p:txBody>
           <a:bodyPr wrap="square" anchor="t" lIns="36576" rIns="36576" tIns="0" bIns="0">
@@ -16101,6 +16389,9 @@
             <a:avLst/>
           </a:prstGeom>
           <a:noFill/>
+          <a:ln>
+            <a:solidFill/>
+          </a:ln>
         </p:spPr>
         <p:txBody>
           <a:bodyPr wrap="square" anchor="t" lIns="36576" rIns="36576" tIns="0" bIns="0">
@@ -16136,6 +16427,9 @@
             <a:avLst/>
           </a:prstGeom>
           <a:noFill/>
+          <a:ln>
+            <a:solidFill/>
+          </a:ln>
         </p:spPr>
         <p:txBody>
           <a:bodyPr wrap="square" anchor="t" lIns="36576" rIns="36576" tIns="0" bIns="0">
@@ -16171,6 +16465,9 @@
             <a:avLst/>
           </a:prstGeom>
           <a:noFill/>
+          <a:ln>
+            <a:solidFill/>
+          </a:ln>
         </p:spPr>
         <p:txBody>
           <a:bodyPr wrap="square" anchor="t" lIns="36576" rIns="36576" tIns="0" bIns="0">
@@ -16206,6 +16503,9 @@
             <a:avLst/>
           </a:prstGeom>
           <a:noFill/>
+          <a:ln>
+            <a:solidFill/>
+          </a:ln>
         </p:spPr>
         <p:txBody>
           <a:bodyPr wrap="square" anchor="t" lIns="36576" rIns="36576" tIns="0" bIns="0">
@@ -16241,6 +16541,9 @@
             <a:avLst/>
           </a:prstGeom>
           <a:noFill/>
+          <a:ln>
+            <a:solidFill/>
+          </a:ln>
         </p:spPr>
         <p:txBody>
           <a:bodyPr wrap="square" anchor="t" lIns="36576" rIns="36576" tIns="0" bIns="0">
@@ -16276,6 +16579,9 @@
             <a:avLst/>
           </a:prstGeom>
           <a:noFill/>
+          <a:ln>
+            <a:solidFill/>
+          </a:ln>
         </p:spPr>
         <p:txBody>
           <a:bodyPr wrap="square" anchor="t" lIns="36576" rIns="36576" tIns="0" bIns="0">
@@ -16311,6 +16617,9 @@
             <a:avLst/>
           </a:prstGeom>
           <a:noFill/>
+          <a:ln>
+            <a:solidFill/>
+          </a:ln>
         </p:spPr>
         <p:txBody>
           <a:bodyPr wrap="square" anchor="t" lIns="36576" rIns="36576" tIns="0" bIns="0">
@@ -16346,6 +16655,9 @@
             <a:avLst/>
           </a:prstGeom>
           <a:noFill/>
+          <a:ln>
+            <a:solidFill/>
+          </a:ln>
         </p:spPr>
         <p:txBody>
           <a:bodyPr wrap="square" anchor="t" lIns="36576" rIns="36576" tIns="0" bIns="0">
@@ -16436,6 +16748,9 @@
             <a:avLst/>
           </a:prstGeom>
           <a:noFill/>
+          <a:ln>
+            <a:solidFill/>
+          </a:ln>
         </p:spPr>
         <p:txBody>
           <a:bodyPr wrap="square" anchor="t" lIns="36576" rIns="36576" tIns="0" bIns="0">
@@ -16471,6 +16786,9 @@
             <a:avLst/>
           </a:prstGeom>
           <a:noFill/>
+          <a:ln>
+            <a:solidFill/>
+          </a:ln>
         </p:spPr>
         <p:txBody>
           <a:bodyPr wrap="square" anchor="t" lIns="36576" rIns="36576" tIns="0" bIns="0">
@@ -16506,6 +16824,9 @@
             <a:avLst/>
           </a:prstGeom>
           <a:noFill/>
+          <a:ln>
+            <a:solidFill/>
+          </a:ln>
         </p:spPr>
         <p:txBody>
           <a:bodyPr wrap="square" anchor="t" lIns="36576" rIns="36576" tIns="0" bIns="0">
@@ -16541,6 +16862,9 @@
             <a:avLst/>
           </a:prstGeom>
           <a:noFill/>
+          <a:ln>
+            <a:solidFill/>
+          </a:ln>
         </p:spPr>
         <p:txBody>
           <a:bodyPr wrap="square" anchor="t" lIns="36576" rIns="36576" tIns="0" bIns="0">
@@ -16576,6 +16900,9 @@
             <a:avLst/>
           </a:prstGeom>
           <a:noFill/>
+          <a:ln>
+            <a:solidFill/>
+          </a:ln>
         </p:spPr>
         <p:txBody>
           <a:bodyPr wrap="square" anchor="t" lIns="36576" rIns="36576" tIns="0" bIns="0">
@@ -16611,6 +16938,9 @@
             <a:avLst/>
           </a:prstGeom>
           <a:noFill/>
+          <a:ln>
+            <a:solidFill/>
+          </a:ln>
         </p:spPr>
         <p:txBody>
           <a:bodyPr wrap="square" anchor="t" lIns="36576" rIns="36576" tIns="0" bIns="0">
@@ -16646,6 +16976,9 @@
             <a:avLst/>
           </a:prstGeom>
           <a:noFill/>
+          <a:ln>
+            <a:solidFill/>
+          </a:ln>
         </p:spPr>
         <p:txBody>
           <a:bodyPr wrap="square" anchor="t" lIns="36576" rIns="36576" tIns="0" bIns="0">
@@ -16681,6 +17014,9 @@
             <a:avLst/>
           </a:prstGeom>
           <a:noFill/>
+          <a:ln>
+            <a:solidFill/>
+          </a:ln>
         </p:spPr>
         <p:txBody>
           <a:bodyPr wrap="square" anchor="t" lIns="36576" rIns="36576" tIns="0" bIns="0">
@@ -16716,6 +17052,9 @@
             <a:avLst/>
           </a:prstGeom>
           <a:noFill/>
+          <a:ln>
+            <a:solidFill/>
+          </a:ln>
         </p:spPr>
         <p:txBody>
           <a:bodyPr wrap="square" anchor="t" lIns="36576" rIns="36576" tIns="0" bIns="0">
@@ -16751,6 +17090,9 @@
             <a:avLst/>
           </a:prstGeom>
           <a:noFill/>
+          <a:ln>
+            <a:solidFill/>
+          </a:ln>
         </p:spPr>
         <p:txBody>
           <a:bodyPr wrap="square" anchor="t" lIns="36576" rIns="36576" tIns="0" bIns="0">
@@ -16786,6 +17128,9 @@
             <a:avLst/>
           </a:prstGeom>
           <a:noFill/>
+          <a:ln>
+            <a:solidFill/>
+          </a:ln>
         </p:spPr>
         <p:txBody>
           <a:bodyPr wrap="square" anchor="t" lIns="36576" rIns="36576" tIns="0" bIns="0">
@@ -16821,6 +17166,9 @@
             <a:avLst/>
           </a:prstGeom>
           <a:noFill/>
+          <a:ln>
+            <a:solidFill/>
+          </a:ln>
         </p:spPr>
         <p:txBody>
           <a:bodyPr wrap="square" anchor="t" lIns="36576" rIns="36576" tIns="0" bIns="0">
@@ -16856,6 +17204,9 @@
             <a:avLst/>
           </a:prstGeom>
           <a:noFill/>
+          <a:ln>
+            <a:solidFill/>
+          </a:ln>
         </p:spPr>
         <p:txBody>
           <a:bodyPr wrap="square" anchor="t" lIns="36576" rIns="36576" tIns="0" bIns="0">
@@ -16891,6 +17242,9 @@
             <a:avLst/>
           </a:prstGeom>
           <a:noFill/>
+          <a:ln>
+            <a:solidFill/>
+          </a:ln>
         </p:spPr>
         <p:txBody>
           <a:bodyPr wrap="square" anchor="t" lIns="36576" rIns="36576" tIns="0" bIns="0">
@@ -16926,6 +17280,9 @@
             <a:avLst/>
           </a:prstGeom>
           <a:noFill/>
+          <a:ln>
+            <a:solidFill/>
+          </a:ln>
         </p:spPr>
         <p:txBody>
           <a:bodyPr wrap="square" anchor="t" lIns="36576" rIns="36576" tIns="0" bIns="0">
@@ -16985,6 +17342,9 @@
             <a:avLst/>
           </a:prstGeom>
           <a:noFill/>
+          <a:ln>
+            <a:solidFill/>
+          </a:ln>
         </p:spPr>
         <p:txBody>
           <a:bodyPr wrap="square" anchor="t" lIns="36576" rIns="36576" tIns="0" bIns="0">
@@ -17020,6 +17380,9 @@
             <a:avLst/>
           </a:prstGeom>
           <a:noFill/>
+          <a:ln>
+            <a:solidFill/>
+          </a:ln>
         </p:spPr>
         <p:txBody>
           <a:bodyPr wrap="square" anchor="t" lIns="36576" rIns="36576" tIns="0" bIns="0">
@@ -17073,6 +17436,9 @@
             <a:avLst/>
           </a:prstGeom>
           <a:noFill/>
+          <a:ln>
+            <a:solidFill/>
+          </a:ln>
         </p:spPr>
         <p:txBody>
           <a:bodyPr wrap="square" anchor="ctr" lIns="36576" rIns="36576" tIns="0" bIns="0">
@@ -17108,6 +17474,9 @@
             <a:avLst/>
           </a:prstGeom>
           <a:noFill/>
+          <a:ln>
+            <a:solidFill/>
+          </a:ln>
         </p:spPr>
         <p:txBody>
           <a:bodyPr wrap="square" anchor="t" lIns="36576" rIns="36576" tIns="0" bIns="0">
@@ -17143,11 +17512,11 @@
             <a:avLst/>
           </a:prstGeom>
           <a:solidFill>
-            <a:srgbClr val="ECF2FB"/>
+            <a:srgbClr val="CFE0FA"/>
           </a:solidFill>
           <a:ln w="12700">
             <a:solidFill>
-              <a:srgbClr val="266EBE"/>
+              <a:srgbClr val="1B5FB0"/>
             </a:solidFill>
           </a:ln>
           <a:effectLst/>
@@ -17189,6 +17558,9 @@
             <a:avLst/>
           </a:prstGeom>
           <a:noFill/>
+          <a:ln>
+            <a:solidFill/>
+          </a:ln>
         </p:spPr>
         <p:txBody>
           <a:bodyPr wrap="square" anchor="t" lIns="36576" rIns="36576" tIns="0" bIns="0">
@@ -17224,11 +17596,11 @@
             <a:avLst/>
           </a:prstGeom>
           <a:solidFill>
-            <a:srgbClr val="ECF6EF"/>
+            <a:srgbClr val="D4F0D8"/>
           </a:solidFill>
           <a:ln w="12700">
             <a:solidFill>
-              <a:srgbClr val="2E864B"/>
+              <a:srgbClr val="23794A"/>
             </a:solidFill>
           </a:ln>
           <a:effectLst/>
@@ -17270,6 +17642,9 @@
             <a:avLst/>
           </a:prstGeom>
           <a:noFill/>
+          <a:ln>
+            <a:solidFill/>
+          </a:ln>
         </p:spPr>
         <p:txBody>
           <a:bodyPr wrap="square" anchor="t" lIns="36576" rIns="36576" tIns="0" bIns="0">
@@ -17305,11 +17680,11 @@
             <a:avLst/>
           </a:prstGeom>
           <a:solidFill>
-            <a:srgbClr val="FBF4E8"/>
+            <a:srgbClr val="FDE3BF"/>
           </a:solidFill>
           <a:ln w="12700">
             <a:solidFill>
-              <a:srgbClr val="C87A0E"/>
+              <a:srgbClr val="B5720A"/>
             </a:solidFill>
           </a:ln>
           <a:effectLst/>
@@ -17351,6 +17726,9 @@
             <a:avLst/>
           </a:prstGeom>
           <a:noFill/>
+          <a:ln>
+            <a:solidFill/>
+          </a:ln>
         </p:spPr>
         <p:txBody>
           <a:bodyPr wrap="square" anchor="t" lIns="36576" rIns="36576" tIns="0" bIns="0">
@@ -17386,11 +17764,11 @@
             <a:avLst/>
           </a:prstGeom>
           <a:solidFill>
-            <a:srgbClr val="EAF4F6"/>
+            <a:srgbClr val="E8DAF6"/>
           </a:solidFill>
           <a:ln w="12700">
             <a:solidFill>
-              <a:srgbClr val="1F7A8C"/>
+              <a:srgbClr val="6B3FA0"/>
             </a:solidFill>
           </a:ln>
           <a:effectLst/>
@@ -17432,6 +17810,9 @@
             <a:avLst/>
           </a:prstGeom>
           <a:noFill/>
+          <a:ln>
+            <a:solidFill/>
+          </a:ln>
         </p:spPr>
         <p:txBody>
           <a:bodyPr wrap="square" anchor="t" lIns="36576" rIns="36576" tIns="0" bIns="0">
@@ -17467,11 +17848,11 @@
             <a:avLst/>
           </a:prstGeom>
           <a:solidFill>
-            <a:srgbClr val="ECF6EF"/>
+            <a:srgbClr val="D4F0D8"/>
           </a:solidFill>
           <a:ln w="15875">
             <a:solidFill>
-              <a:srgbClr val="2E864B"/>
+              <a:srgbClr val="23794A"/>
             </a:solidFill>
           </a:ln>
           <a:effectLst/>
@@ -17570,11 +17951,11 @@
             <a:avLst/>
           </a:prstGeom>
           <a:solidFill>
-            <a:srgbClr val="ECF6EF"/>
+            <a:srgbClr val="D4F0D8"/>
           </a:solidFill>
           <a:ln w="15875">
             <a:solidFill>
-              <a:srgbClr val="2E864B"/>
+              <a:srgbClr val="23794A"/>
             </a:solidFill>
           </a:ln>
           <a:effectLst/>
@@ -17673,11 +18054,11 @@
             <a:avLst/>
           </a:prstGeom>
           <a:solidFill>
-            <a:srgbClr val="ECF6EF"/>
+            <a:srgbClr val="D4F0D8"/>
           </a:solidFill>
           <a:ln w="15875">
             <a:solidFill>
-              <a:srgbClr val="2E864B"/>
+              <a:srgbClr val="23794A"/>
             </a:solidFill>
           </a:ln>
           <a:effectLst/>
@@ -17776,11 +18157,11 @@
             <a:avLst/>
           </a:prstGeom>
           <a:solidFill>
-            <a:srgbClr val="ECF6EF"/>
+            <a:srgbClr val="D4F0D8"/>
           </a:solidFill>
           <a:ln w="15875">
             <a:solidFill>
-              <a:srgbClr val="2E864B"/>
+              <a:srgbClr val="23794A"/>
             </a:solidFill>
           </a:ln>
           <a:effectLst/>
@@ -17879,11 +18260,11 @@
             <a:avLst/>
           </a:prstGeom>
           <a:solidFill>
-            <a:srgbClr val="ECF6EF"/>
+            <a:srgbClr val="D4F0D8"/>
           </a:solidFill>
           <a:ln w="15875">
             <a:solidFill>
-              <a:srgbClr val="2E864B"/>
+              <a:srgbClr val="23794A"/>
             </a:solidFill>
           </a:ln>
           <a:effectLst/>
@@ -17982,11 +18363,11 @@
             <a:avLst/>
           </a:prstGeom>
           <a:solidFill>
-            <a:srgbClr val="FBF4E8"/>
+            <a:srgbClr val="FDE3BF"/>
           </a:solidFill>
           <a:ln w="15875">
             <a:solidFill>
-              <a:srgbClr val="C87A0E"/>
+              <a:srgbClr val="B5720A"/>
             </a:solidFill>
           </a:ln>
           <a:effectLst/>
@@ -18085,11 +18466,11 @@
             <a:avLst/>
           </a:prstGeom>
           <a:solidFill>
-            <a:srgbClr val="ECF6EF"/>
+            <a:srgbClr val="D4F0D8"/>
           </a:solidFill>
           <a:ln w="15875">
             <a:solidFill>
-              <a:srgbClr val="2E864B"/>
+              <a:srgbClr val="23794A"/>
             </a:solidFill>
           </a:ln>
           <a:effectLst/>
@@ -18140,7 +18521,7 @@
             <a:r>
               <a:rPr sz="800" b="1">
                 <a:solidFill>
-                  <a:srgbClr val="2E864B"/>
+                  <a:srgbClr val="23794A"/>
                 </a:solidFill>
                 <a:latin typeface="맑은 고딕"/>
               </a:rPr>
@@ -18200,11 +18581,11 @@
             <a:avLst/>
           </a:prstGeom>
           <a:solidFill>
-            <a:srgbClr val="ECF6EF"/>
+            <a:srgbClr val="D4F0D8"/>
           </a:solidFill>
           <a:ln w="15875">
             <a:solidFill>
-              <a:srgbClr val="2E864B"/>
+              <a:srgbClr val="23794A"/>
             </a:solidFill>
           </a:ln>
           <a:effectLst/>
@@ -18267,11 +18648,11 @@
             <a:avLst/>
           </a:prstGeom>
           <a:solidFill>
-            <a:srgbClr val="ECF6EF"/>
+            <a:srgbClr val="D4F0D8"/>
           </a:solidFill>
           <a:ln w="15875">
             <a:solidFill>
-              <a:srgbClr val="2E864B"/>
+              <a:srgbClr val="23794A"/>
             </a:solidFill>
           </a:ln>
           <a:effectLst/>
@@ -18370,11 +18751,11 @@
             <a:avLst/>
           </a:prstGeom>
           <a:solidFill>
-            <a:srgbClr val="ECF6EF"/>
+            <a:srgbClr val="D4F0D8"/>
           </a:solidFill>
           <a:ln w="15875">
             <a:solidFill>
-              <a:srgbClr val="2E864B"/>
+              <a:srgbClr val="23794A"/>
             </a:solidFill>
           </a:ln>
           <a:effectLst/>
@@ -18473,11 +18854,11 @@
             <a:avLst/>
           </a:prstGeom>
           <a:solidFill>
-            <a:srgbClr val="ECF6EF"/>
+            <a:srgbClr val="D4F0D8"/>
           </a:solidFill>
           <a:ln w="15875">
             <a:solidFill>
-              <a:srgbClr val="2E864B"/>
+              <a:srgbClr val="23794A"/>
             </a:solidFill>
           </a:ln>
           <a:effectLst/>
@@ -18576,11 +18957,11 @@
             <a:avLst/>
           </a:prstGeom>
           <a:solidFill>
-            <a:srgbClr val="ECF6EF"/>
+            <a:srgbClr val="D4F0D8"/>
           </a:solidFill>
           <a:ln w="15875">
             <a:solidFill>
-              <a:srgbClr val="2E864B"/>
+              <a:srgbClr val="23794A"/>
             </a:solidFill>
           </a:ln>
           <a:effectLst/>
@@ -18679,11 +19060,11 @@
             <a:avLst/>
           </a:prstGeom>
           <a:solidFill>
-            <a:srgbClr val="ECF6EF"/>
+            <a:srgbClr val="D4F0D8"/>
           </a:solidFill>
           <a:ln w="15875">
             <a:solidFill>
-              <a:srgbClr val="2E864B"/>
+              <a:srgbClr val="23794A"/>
             </a:solidFill>
           </a:ln>
           <a:effectLst/>
@@ -18782,11 +19163,11 @@
             <a:avLst/>
           </a:prstGeom>
           <a:solidFill>
-            <a:srgbClr val="FBF4E8"/>
+            <a:srgbClr val="FDE3BF"/>
           </a:solidFill>
           <a:ln w="15875">
             <a:solidFill>
-              <a:srgbClr val="C87A0E"/>
+              <a:srgbClr val="B5720A"/>
             </a:solidFill>
           </a:ln>
           <a:effectLst/>
@@ -18885,11 +19266,11 @@
             <a:avLst/>
           </a:prstGeom>
           <a:solidFill>
-            <a:srgbClr val="ECF6EF"/>
+            <a:srgbClr val="D4F0D8"/>
           </a:solidFill>
           <a:ln w="15875">
             <a:solidFill>
-              <a:srgbClr val="2E864B"/>
+              <a:srgbClr val="23794A"/>
             </a:solidFill>
           </a:ln>
           <a:effectLst/>
@@ -18940,7 +19321,7 @@
             <a:r>
               <a:rPr sz="800" b="1">
                 <a:solidFill>
-                  <a:srgbClr val="2E864B"/>
+                  <a:srgbClr val="23794A"/>
                 </a:solidFill>
                 <a:latin typeface="맑은 고딕"/>
               </a:rPr>
@@ -19000,11 +19381,11 @@
             <a:avLst/>
           </a:prstGeom>
           <a:solidFill>
-            <a:srgbClr val="ECF6EF"/>
+            <a:srgbClr val="D4F0D8"/>
           </a:solidFill>
           <a:ln w="15875">
             <a:solidFill>
-              <a:srgbClr val="2E864B"/>
+              <a:srgbClr val="23794A"/>
             </a:solidFill>
           </a:ln>
           <a:effectLst/>
@@ -19055,7 +19436,7 @@
             <a:r>
               <a:rPr sz="800" b="1">
                 <a:solidFill>
-                  <a:srgbClr val="2E864B"/>
+                  <a:srgbClr val="23794A"/>
                 </a:solidFill>
                 <a:latin typeface="맑은 고딕"/>
               </a:rPr>
@@ -19079,6 +19460,9 @@
             <a:avLst/>
           </a:prstGeom>
           <a:noFill/>
+          <a:ln>
+            <a:solidFill/>
+          </a:ln>
         </p:spPr>
         <p:txBody>
           <a:bodyPr wrap="square" anchor="t" lIns="36576" rIns="36576" tIns="0" bIns="0">
@@ -19114,6 +19498,9 @@
             <a:avLst/>
           </a:prstGeom>
           <a:noFill/>
+          <a:ln>
+            <a:solidFill/>
+          </a:ln>
         </p:spPr>
         <p:txBody>
           <a:bodyPr wrap="square" anchor="t" lIns="36576" rIns="36576" tIns="0" bIns="0">
@@ -19149,6 +19536,9 @@
             <a:avLst/>
           </a:prstGeom>
           <a:noFill/>
+          <a:ln>
+            <a:solidFill/>
+          </a:ln>
         </p:spPr>
         <p:txBody>
           <a:bodyPr wrap="square" anchor="t" lIns="36576" rIns="36576" tIns="0" bIns="0">
@@ -19202,6 +19592,9 @@
             <a:avLst/>
           </a:prstGeom>
           <a:noFill/>
+          <a:ln>
+            <a:solidFill/>
+          </a:ln>
         </p:spPr>
         <p:txBody>
           <a:bodyPr wrap="square" anchor="ctr" lIns="36576" rIns="36576" tIns="0" bIns="0">
@@ -19237,6 +19630,9 @@
             <a:avLst/>
           </a:prstGeom>
           <a:noFill/>
+          <a:ln>
+            <a:solidFill/>
+          </a:ln>
         </p:spPr>
         <p:txBody>
           <a:bodyPr wrap="square" anchor="t" lIns="36576" rIns="36576" tIns="0" bIns="0">
@@ -19272,6 +19668,9 @@
             <a:avLst/>
           </a:prstGeom>
           <a:noFill/>
+          <a:ln>
+            <a:solidFill/>
+          </a:ln>
         </p:spPr>
         <p:txBody>
           <a:bodyPr wrap="square" anchor="t" lIns="36576" rIns="36576" tIns="0" bIns="0">
@@ -19307,11 +19706,11 @@
             <a:avLst/>
           </a:prstGeom>
           <a:solidFill>
-            <a:srgbClr val="ECF6EF"/>
+            <a:srgbClr val="D4F0D8"/>
           </a:solidFill>
           <a:ln w="15875">
             <a:solidFill>
-              <a:srgbClr val="2E864B"/>
+              <a:srgbClr val="23794A"/>
             </a:solidFill>
           </a:ln>
           <a:effectLst/>
@@ -19410,11 +19809,11 @@
             <a:avLst/>
           </a:prstGeom>
           <a:solidFill>
-            <a:srgbClr val="ECF6EF"/>
+            <a:srgbClr val="D4F0D8"/>
           </a:solidFill>
           <a:ln w="15875">
             <a:solidFill>
-              <a:srgbClr val="2E864B"/>
+              <a:srgbClr val="23794A"/>
             </a:solidFill>
           </a:ln>
           <a:effectLst/>
@@ -19513,11 +19912,11 @@
             <a:avLst/>
           </a:prstGeom>
           <a:solidFill>
-            <a:srgbClr val="ECF6EF"/>
+            <a:srgbClr val="D4F0D8"/>
           </a:solidFill>
           <a:ln w="15875">
             <a:solidFill>
-              <a:srgbClr val="2E864B"/>
+              <a:srgbClr val="23794A"/>
             </a:solidFill>
           </a:ln>
           <a:effectLst/>
@@ -19616,11 +20015,11 @@
             <a:avLst/>
           </a:prstGeom>
           <a:solidFill>
-            <a:srgbClr val="ECF6EF"/>
+            <a:srgbClr val="D4F0D8"/>
           </a:solidFill>
           <a:ln w="15875">
             <a:solidFill>
-              <a:srgbClr val="2E864B"/>
+              <a:srgbClr val="23794A"/>
             </a:solidFill>
           </a:ln>
           <a:effectLst/>
@@ -19774,6 +20173,9 @@
             <a:avLst/>
           </a:prstGeom>
           <a:noFill/>
+          <a:ln>
+            <a:solidFill/>
+          </a:ln>
         </p:spPr>
         <p:txBody>
           <a:bodyPr wrap="square" anchor="t" lIns="36576" rIns="36576" tIns="0" bIns="0">
@@ -19900,6 +20302,9 @@
             <a:avLst/>
           </a:prstGeom>
           <a:noFill/>
+          <a:ln>
+            <a:solidFill/>
+          </a:ln>
         </p:spPr>
         <p:txBody>
           <a:bodyPr wrap="square" anchor="t" lIns="36576" rIns="36576" tIns="0" bIns="0">
@@ -20026,6 +20431,9 @@
             <a:avLst/>
           </a:prstGeom>
           <a:noFill/>
+          <a:ln>
+            <a:solidFill/>
+          </a:ln>
         </p:spPr>
         <p:txBody>
           <a:bodyPr wrap="square" anchor="t" lIns="36576" rIns="36576" tIns="0" bIns="0">
@@ -20152,6 +20560,9 @@
             <a:avLst/>
           </a:prstGeom>
           <a:noFill/>
+          <a:ln>
+            <a:solidFill/>
+          </a:ln>
         </p:spPr>
         <p:txBody>
           <a:bodyPr wrap="square" anchor="t" lIns="36576" rIns="36576" tIns="0" bIns="0">
@@ -20278,6 +20689,9 @@
             <a:avLst/>
           </a:prstGeom>
           <a:noFill/>
+          <a:ln>
+            <a:solidFill/>
+          </a:ln>
         </p:spPr>
         <p:txBody>
           <a:bodyPr wrap="square" anchor="t" lIns="36576" rIns="36576" tIns="0" bIns="0">
@@ -20353,7 +20767,7 @@
           </a:solidFill>
           <a:ln w="15875">
             <a:solidFill>
-              <a:srgbClr val="2E864B"/>
+              <a:srgbClr val="23794A"/>
             </a:solidFill>
           </a:ln>
           <a:effectLst/>
@@ -20404,6 +20818,9 @@
             <a:avLst/>
           </a:prstGeom>
           <a:noFill/>
+          <a:ln>
+            <a:solidFill/>
+          </a:ln>
         </p:spPr>
         <p:txBody>
           <a:bodyPr wrap="square" anchor="t" lIns="36576" rIns="36576" tIns="0" bIns="0">
@@ -20479,7 +20896,7 @@
           </a:solidFill>
           <a:ln w="15875">
             <a:solidFill>
-              <a:srgbClr val="2E864B"/>
+              <a:srgbClr val="23794A"/>
             </a:solidFill>
           </a:ln>
           <a:effectLst/>
@@ -20530,6 +20947,9 @@
             <a:avLst/>
           </a:prstGeom>
           <a:noFill/>
+          <a:ln>
+            <a:solidFill/>
+          </a:ln>
         </p:spPr>
         <p:txBody>
           <a:bodyPr wrap="square" anchor="t" lIns="36576" rIns="36576" tIns="0" bIns="0">
@@ -20565,6 +20985,9 @@
             <a:avLst/>
           </a:prstGeom>
           <a:noFill/>
+          <a:ln>
+            <a:solidFill/>
+          </a:ln>
         </p:spPr>
         <p:txBody>
           <a:bodyPr wrap="square" anchor="t" lIns="36576" rIns="36576" tIns="0" bIns="0">
@@ -20600,11 +21023,11 @@
             <a:avLst/>
           </a:prstGeom>
           <a:solidFill>
-            <a:srgbClr val="ECF6EF"/>
+            <a:srgbClr val="D4F0D8"/>
           </a:solidFill>
           <a:ln w="15875">
             <a:solidFill>
-              <a:srgbClr val="2E864B"/>
+              <a:srgbClr val="23794A"/>
             </a:solidFill>
           </a:ln>
           <a:effectLst/>
@@ -20667,11 +21090,11 @@
             <a:avLst/>
           </a:prstGeom>
           <a:solidFill>
-            <a:srgbClr val="FBF4E8"/>
+            <a:srgbClr val="FDE3BF"/>
           </a:solidFill>
           <a:ln w="15875">
             <a:solidFill>
-              <a:srgbClr val="C87A0E"/>
+              <a:srgbClr val="B5720A"/>
             </a:solidFill>
           </a:ln>
           <a:effectLst/>
@@ -20734,6 +21157,9 @@
             <a:avLst/>
           </a:prstGeom>
           <a:noFill/>
+          <a:ln>
+            <a:solidFill/>
+          </a:ln>
         </p:spPr>
         <p:txBody>
           <a:bodyPr wrap="square" anchor="t" lIns="36576" rIns="36576" tIns="0" bIns="0">
@@ -20769,6 +21195,9 @@
             <a:avLst/>
           </a:prstGeom>
           <a:noFill/>
+          <a:ln>
+            <a:solidFill/>
+          </a:ln>
         </p:spPr>
         <p:txBody>
           <a:bodyPr wrap="square" anchor="t" lIns="36576" rIns="36576" tIns="0" bIns="0">
@@ -20822,6 +21251,9 @@
             <a:avLst/>
           </a:prstGeom>
           <a:noFill/>
+          <a:ln>
+            <a:solidFill/>
+          </a:ln>
         </p:spPr>
         <p:txBody>
           <a:bodyPr wrap="square" anchor="ctr" lIns="36576" rIns="36576" tIns="0" bIns="0">
@@ -20857,6 +21289,9 @@
             <a:avLst/>
           </a:prstGeom>
           <a:noFill/>
+          <a:ln>
+            <a:solidFill/>
+          </a:ln>
         </p:spPr>
         <p:txBody>
           <a:bodyPr wrap="square" anchor="t" lIns="36576" rIns="36576" tIns="0" bIns="0">
@@ -20892,11 +21327,11 @@
             <a:avLst/>
           </a:prstGeom>
           <a:solidFill>
-            <a:srgbClr val="FBF4E8"/>
+            <a:srgbClr val="FDE3BF"/>
           </a:solidFill>
           <a:ln w="15875">
             <a:solidFill>
-              <a:srgbClr val="C87A0E"/>
+              <a:srgbClr val="B5720A"/>
             </a:solidFill>
           </a:ln>
           <a:effectLst/>
@@ -20995,11 +21430,11 @@
             <a:avLst/>
           </a:prstGeom>
           <a:solidFill>
-            <a:srgbClr val="FBF4E8"/>
+            <a:srgbClr val="FDE3BF"/>
           </a:solidFill>
           <a:ln w="15875">
             <a:solidFill>
-              <a:srgbClr val="C87A0E"/>
+              <a:srgbClr val="B5720A"/>
             </a:solidFill>
           </a:ln>
           <a:effectLst/>
@@ -21201,11 +21636,11 @@
             <a:avLst/>
           </a:prstGeom>
           <a:solidFill>
-            <a:srgbClr val="FBF4E8"/>
+            <a:srgbClr val="FDE3BF"/>
           </a:solidFill>
           <a:ln w="15875">
             <a:solidFill>
-              <a:srgbClr val="C87A0E"/>
+              <a:srgbClr val="B5720A"/>
             </a:solidFill>
           </a:ln>
           <a:effectLst/>
@@ -21268,6 +21703,9 @@
             <a:avLst/>
           </a:prstGeom>
           <a:noFill/>
+          <a:ln>
+            <a:solidFill/>
+          </a:ln>
         </p:spPr>
         <p:txBody>
           <a:bodyPr wrap="square" anchor="t" lIns="36576" rIns="36576" tIns="0" bIns="0">
@@ -21303,11 +21741,11 @@
             <a:avLst/>
           </a:prstGeom>
           <a:solidFill>
-            <a:srgbClr val="FBF4E8"/>
+            <a:srgbClr val="FDE3BF"/>
           </a:solidFill>
           <a:ln w="15875">
             <a:solidFill>
-              <a:srgbClr val="C87A0E"/>
+              <a:srgbClr val="B5720A"/>
             </a:solidFill>
           </a:ln>
           <a:effectLst/>
@@ -21362,7 +21800,7 @@
           </a:solidFill>
           <a:ln w="15875">
             <a:solidFill>
-              <a:srgbClr val="C87A0E"/>
+              <a:srgbClr val="B5720A"/>
             </a:solidFill>
           </a:ln>
           <a:effectLst/>
@@ -21413,6 +21851,9 @@
             <a:avLst/>
           </a:prstGeom>
           <a:noFill/>
+          <a:ln>
+            <a:solidFill/>
+          </a:ln>
         </p:spPr>
         <p:txBody>
           <a:bodyPr wrap="square" anchor="t" lIns="36576" rIns="36576" tIns="0" bIns="0">
@@ -21484,11 +21925,11 @@
             <a:avLst/>
           </a:prstGeom>
           <a:solidFill>
-            <a:srgbClr val="FBF4E8"/>
+            <a:srgbClr val="FDE3BF"/>
           </a:solidFill>
           <a:ln w="15875">
             <a:solidFill>
-              <a:srgbClr val="C87A0E"/>
+              <a:srgbClr val="B5720A"/>
             </a:solidFill>
           </a:ln>
           <a:effectLst/>
@@ -21543,7 +21984,7 @@
           </a:solidFill>
           <a:ln w="15875">
             <a:solidFill>
-              <a:srgbClr val="C87A0E"/>
+              <a:srgbClr val="B5720A"/>
             </a:solidFill>
           </a:ln>
           <a:effectLst/>
@@ -21594,6 +22035,9 @@
             <a:avLst/>
           </a:prstGeom>
           <a:noFill/>
+          <a:ln>
+            <a:solidFill/>
+          </a:ln>
         </p:spPr>
         <p:txBody>
           <a:bodyPr wrap="square" anchor="t" lIns="36576" rIns="36576" tIns="0" bIns="0">
@@ -21665,11 +22109,11 @@
             <a:avLst/>
           </a:prstGeom>
           <a:solidFill>
-            <a:srgbClr val="FBF4E8"/>
+            <a:srgbClr val="FDE3BF"/>
           </a:solidFill>
           <a:ln w="15875">
             <a:solidFill>
-              <a:srgbClr val="C87A0E"/>
+              <a:srgbClr val="B5720A"/>
             </a:solidFill>
           </a:ln>
           <a:effectLst/>
@@ -21724,7 +22168,7 @@
           </a:solidFill>
           <a:ln w="15875">
             <a:solidFill>
-              <a:srgbClr val="C87A0E"/>
+              <a:srgbClr val="B5720A"/>
             </a:solidFill>
           </a:ln>
           <a:effectLst/>
@@ -21775,6 +22219,9 @@
             <a:avLst/>
           </a:prstGeom>
           <a:noFill/>
+          <a:ln>
+            <a:solidFill/>
+          </a:ln>
         </p:spPr>
         <p:txBody>
           <a:bodyPr wrap="square" anchor="t" lIns="36576" rIns="36576" tIns="0" bIns="0">
@@ -21846,11 +22293,11 @@
             <a:avLst/>
           </a:prstGeom>
           <a:solidFill>
-            <a:srgbClr val="FBF4E8"/>
+            <a:srgbClr val="FDE3BF"/>
           </a:solidFill>
           <a:ln w="15875">
             <a:solidFill>
-              <a:srgbClr val="C87A0E"/>
+              <a:srgbClr val="B5720A"/>
             </a:solidFill>
           </a:ln>
           <a:effectLst/>
@@ -21905,7 +22352,7 @@
           </a:solidFill>
           <a:ln w="15875">
             <a:solidFill>
-              <a:srgbClr val="C87A0E"/>
+              <a:srgbClr val="B5720A"/>
             </a:solidFill>
           </a:ln>
           <a:effectLst/>
@@ -21956,6 +22403,9 @@
             <a:avLst/>
           </a:prstGeom>
           <a:noFill/>
+          <a:ln>
+            <a:solidFill/>
+          </a:ln>
         </p:spPr>
         <p:txBody>
           <a:bodyPr wrap="square" anchor="t" lIns="36576" rIns="36576" tIns="0" bIns="0">
@@ -22027,11 +22477,11 @@
             <a:avLst/>
           </a:prstGeom>
           <a:solidFill>
-            <a:srgbClr val="FBF4E8"/>
+            <a:srgbClr val="FDE3BF"/>
           </a:solidFill>
           <a:ln w="15875">
             <a:solidFill>
-              <a:srgbClr val="C87A0E"/>
+              <a:srgbClr val="B5720A"/>
             </a:solidFill>
           </a:ln>
           <a:effectLst/>
@@ -22086,7 +22536,7 @@
           </a:solidFill>
           <a:ln w="15875">
             <a:solidFill>
-              <a:srgbClr val="C87A0E"/>
+              <a:srgbClr val="B5720A"/>
             </a:solidFill>
           </a:ln>
           <a:effectLst/>
@@ -22137,6 +22587,9 @@
             <a:avLst/>
           </a:prstGeom>
           <a:noFill/>
+          <a:ln>
+            <a:solidFill/>
+          </a:ln>
         </p:spPr>
         <p:txBody>
           <a:bodyPr wrap="square" anchor="t" lIns="36576" rIns="36576" tIns="0" bIns="0">
@@ -22208,11 +22661,11 @@
             <a:avLst/>
           </a:prstGeom>
           <a:solidFill>
-            <a:srgbClr val="FBF4E8"/>
+            <a:srgbClr val="FDE3BF"/>
           </a:solidFill>
           <a:ln w="15875">
             <a:solidFill>
-              <a:srgbClr val="C87A0E"/>
+              <a:srgbClr val="B5720A"/>
             </a:solidFill>
           </a:ln>
           <a:effectLst/>
@@ -22267,7 +22720,7 @@
           </a:solidFill>
           <a:ln w="15875">
             <a:solidFill>
-              <a:srgbClr val="C87A0E"/>
+              <a:srgbClr val="B5720A"/>
             </a:solidFill>
           </a:ln>
           <a:effectLst/>
@@ -22318,6 +22771,9 @@
             <a:avLst/>
           </a:prstGeom>
           <a:noFill/>
+          <a:ln>
+            <a:solidFill/>
+          </a:ln>
         </p:spPr>
         <p:txBody>
           <a:bodyPr wrap="square" anchor="t" lIns="36576" rIns="36576" tIns="0" bIns="0">
@@ -22353,6 +22809,9 @@
             <a:avLst/>
           </a:prstGeom>
           <a:noFill/>
+          <a:ln>
+            <a:solidFill/>
+          </a:ln>
         </p:spPr>
         <p:txBody>
           <a:bodyPr wrap="square" anchor="t" lIns="36576" rIns="36576" tIns="0" bIns="0">
@@ -22400,6 +22859,9 @@
             <a:avLst/>
           </a:prstGeom>
           <a:noFill/>
+          <a:ln>
+            <a:solidFill/>
+          </a:ln>
         </p:spPr>
         <p:txBody>
           <a:bodyPr wrap="square" anchor="t" lIns="36576" rIns="36576" tIns="0" bIns="0">
@@ -22435,6 +22897,9 @@
             <a:avLst/>
           </a:prstGeom>
           <a:noFill/>
+          <a:ln>
+            <a:solidFill/>
+          </a:ln>
         </p:spPr>
         <p:txBody>
           <a:bodyPr wrap="square" anchor="t" lIns="36576" rIns="36576" tIns="0" bIns="0">

--- a/docs/산출물_20260921/09_함수단_흐름도.pptx
+++ b/docs/산출물_20260921/09_함수단_흐름도.pptx
@@ -3117,7 +3117,7 @@
             <a:srgbClr val="1E2761"/>
           </a:solidFill>
           <a:ln>
-            <a:solidFill/>
+            <a:noFill/>
           </a:ln>
           <a:effectLst/>
         </p:spPr>
@@ -3158,9 +3158,6 @@
             <a:avLst/>
           </a:prstGeom>
           <a:noFill/>
-          <a:ln>
-            <a:solidFill/>
-          </a:ln>
         </p:spPr>
         <p:txBody>
           <a:bodyPr wrap="square" anchor="t" lIns="36576" rIns="36576" tIns="0" bIns="0">
@@ -3196,9 +3193,6 @@
             <a:avLst/>
           </a:prstGeom>
           <a:noFill/>
-          <a:ln>
-            <a:solidFill/>
-          </a:ln>
         </p:spPr>
         <p:txBody>
           <a:bodyPr wrap="square" anchor="t" lIns="36576" rIns="36576" tIns="0" bIns="0">
@@ -3234,9 +3228,6 @@
             <a:avLst/>
           </a:prstGeom>
           <a:noFill/>
-          <a:ln>
-            <a:solidFill/>
-          </a:ln>
         </p:spPr>
         <p:txBody>
           <a:bodyPr wrap="square" anchor="t" lIns="36576" rIns="36576" tIns="0" bIns="0">
@@ -3272,9 +3263,6 @@
             <a:avLst/>
           </a:prstGeom>
           <a:noFill/>
-          <a:ln>
-            <a:solidFill/>
-          </a:ln>
         </p:spPr>
         <p:txBody>
           <a:bodyPr wrap="square" anchor="t" lIns="36576" rIns="36576" tIns="0" bIns="0">
@@ -3310,9 +3298,6 @@
             <a:avLst/>
           </a:prstGeom>
           <a:noFill/>
-          <a:ln>
-            <a:solidFill/>
-          </a:ln>
         </p:spPr>
         <p:txBody>
           <a:bodyPr wrap="square" anchor="t" lIns="36576" rIns="36576" tIns="0" bIns="0">
@@ -3366,9 +3351,6 @@
             <a:avLst/>
           </a:prstGeom>
           <a:noFill/>
-          <a:ln>
-            <a:solidFill/>
-          </a:ln>
         </p:spPr>
         <p:txBody>
           <a:bodyPr wrap="square" anchor="ctr" lIns="36576" rIns="36576" tIns="0" bIns="0">
@@ -3404,9 +3386,6 @@
             <a:avLst/>
           </a:prstGeom>
           <a:noFill/>
-          <a:ln>
-            <a:solidFill/>
-          </a:ln>
         </p:spPr>
         <p:txBody>
           <a:bodyPr wrap="square" anchor="t" lIns="36576" rIns="36576" tIns="0" bIns="0">
@@ -3442,9 +3421,6 @@
             <a:avLst/>
           </a:prstGeom>
           <a:noFill/>
-          <a:ln>
-            <a:solidFill/>
-          </a:ln>
         </p:spPr>
         <p:txBody>
           <a:bodyPr wrap="square" anchor="t" lIns="36576" rIns="36576" tIns="0" bIns="0">
@@ -3535,9 +3511,6 @@
             <a:avLst/>
           </a:prstGeom>
           <a:noFill/>
-          <a:ln>
-            <a:solidFill/>
-          </a:ln>
         </p:spPr>
         <p:txBody>
           <a:bodyPr wrap="square" anchor="t" lIns="36576" rIns="36576" tIns="0" bIns="0">
@@ -3664,9 +3637,6 @@
             <a:avLst/>
           </a:prstGeom>
           <a:noFill/>
-          <a:ln>
-            <a:solidFill/>
-          </a:ln>
         </p:spPr>
         <p:txBody>
           <a:bodyPr wrap="square" anchor="t" lIns="36576" rIns="36576" tIns="0" bIns="0">
@@ -3793,9 +3763,6 @@
             <a:avLst/>
           </a:prstGeom>
           <a:noFill/>
-          <a:ln>
-            <a:solidFill/>
-          </a:ln>
         </p:spPr>
         <p:txBody>
           <a:bodyPr wrap="square" anchor="t" lIns="36576" rIns="36576" tIns="0" bIns="0">
@@ -3922,9 +3889,6 @@
             <a:avLst/>
           </a:prstGeom>
           <a:noFill/>
-          <a:ln>
-            <a:solidFill/>
-          </a:ln>
         </p:spPr>
         <p:txBody>
           <a:bodyPr wrap="square" anchor="t" lIns="36576" rIns="36576" tIns="0" bIns="0">
@@ -4051,9 +4015,6 @@
             <a:avLst/>
           </a:prstGeom>
           <a:noFill/>
-          <a:ln>
-            <a:solidFill/>
-          </a:ln>
         </p:spPr>
         <p:txBody>
           <a:bodyPr wrap="square" anchor="t" lIns="36576" rIns="36576" tIns="0" bIns="0">
@@ -4180,9 +4141,6 @@
             <a:avLst/>
           </a:prstGeom>
           <a:noFill/>
-          <a:ln>
-            <a:solidFill/>
-          </a:ln>
         </p:spPr>
         <p:txBody>
           <a:bodyPr wrap="square" anchor="t" lIns="36576" rIns="36576" tIns="0" bIns="0">
@@ -4218,9 +4176,6 @@
             <a:avLst/>
           </a:prstGeom>
           <a:noFill/>
-          <a:ln>
-            <a:solidFill/>
-          </a:ln>
         </p:spPr>
         <p:txBody>
           <a:bodyPr wrap="square" anchor="t" lIns="36576" rIns="36576" tIns="0" bIns="0">
@@ -4311,9 +4266,6 @@
             <a:avLst/>
           </a:prstGeom>
           <a:noFill/>
-          <a:ln>
-            <a:solidFill/>
-          </a:ln>
         </p:spPr>
         <p:txBody>
           <a:bodyPr wrap="square" anchor="t" lIns="36576" rIns="36576" tIns="0" bIns="0">
@@ -4404,9 +4356,6 @@
             <a:avLst/>
           </a:prstGeom>
           <a:noFill/>
-          <a:ln>
-            <a:solidFill/>
-          </a:ln>
         </p:spPr>
         <p:txBody>
           <a:bodyPr wrap="square" anchor="t" lIns="36576" rIns="36576" tIns="0" bIns="0">
@@ -4497,9 +4446,6 @@
             <a:avLst/>
           </a:prstGeom>
           <a:noFill/>
-          <a:ln>
-            <a:solidFill/>
-          </a:ln>
         </p:spPr>
         <p:txBody>
           <a:bodyPr wrap="square" anchor="t" lIns="36576" rIns="36576" tIns="0" bIns="0">
@@ -4535,9 +4481,6 @@
             <a:avLst/>
           </a:prstGeom>
           <a:noFill/>
-          <a:ln>
-            <a:solidFill/>
-          </a:ln>
         </p:spPr>
         <p:txBody>
           <a:bodyPr wrap="square" anchor="t" lIns="36576" rIns="36576" tIns="0" bIns="0">
@@ -4628,9 +4571,6 @@
             <a:avLst/>
           </a:prstGeom>
           <a:noFill/>
-          <a:ln>
-            <a:solidFill/>
-          </a:ln>
         </p:spPr>
         <p:txBody>
           <a:bodyPr wrap="square" anchor="t" lIns="36576" rIns="36576" tIns="0" bIns="0">
@@ -4721,9 +4661,6 @@
             <a:avLst/>
           </a:prstGeom>
           <a:noFill/>
-          <a:ln>
-            <a:solidFill/>
-          </a:ln>
         </p:spPr>
         <p:txBody>
           <a:bodyPr wrap="square" anchor="t" lIns="36576" rIns="36576" tIns="0" bIns="0">
@@ -4759,9 +4696,6 @@
             <a:avLst/>
           </a:prstGeom>
           <a:noFill/>
-          <a:ln>
-            <a:solidFill/>
-          </a:ln>
         </p:spPr>
         <p:txBody>
           <a:bodyPr wrap="square" anchor="t" lIns="36576" rIns="36576" tIns="0" bIns="0">
@@ -4852,9 +4786,6 @@
             <a:avLst/>
           </a:prstGeom>
           <a:noFill/>
-          <a:ln>
-            <a:solidFill/>
-          </a:ln>
         </p:spPr>
         <p:txBody>
           <a:bodyPr wrap="square" anchor="t" lIns="36576" rIns="36576" tIns="0" bIns="0">
@@ -4890,9 +4821,6 @@
             <a:avLst/>
           </a:prstGeom>
           <a:noFill/>
-          <a:ln>
-            <a:solidFill/>
-          </a:ln>
         </p:spPr>
         <p:txBody>
           <a:bodyPr wrap="square" anchor="t" lIns="36576" rIns="36576" tIns="0" bIns="0">
@@ -4983,9 +4911,6 @@
             <a:avLst/>
           </a:prstGeom>
           <a:noFill/>
-          <a:ln>
-            <a:solidFill/>
-          </a:ln>
         </p:spPr>
         <p:txBody>
           <a:bodyPr wrap="square" anchor="t" lIns="36576" rIns="36576" tIns="0" bIns="0">
@@ -5076,9 +5001,6 @@
             <a:avLst/>
           </a:prstGeom>
           <a:noFill/>
-          <a:ln>
-            <a:solidFill/>
-          </a:ln>
         </p:spPr>
         <p:txBody>
           <a:bodyPr wrap="square" anchor="t" lIns="36576" rIns="36576" tIns="0" bIns="0">
@@ -5114,9 +5036,6 @@
             <a:avLst/>
           </a:prstGeom>
           <a:noFill/>
-          <a:ln>
-            <a:solidFill/>
-          </a:ln>
         </p:spPr>
         <p:txBody>
           <a:bodyPr wrap="square" anchor="t" lIns="36576" rIns="36576" tIns="0" bIns="0">
@@ -5152,9 +5071,6 @@
             <a:avLst/>
           </a:prstGeom>
           <a:noFill/>
-          <a:ln>
-            <a:solidFill/>
-          </a:ln>
         </p:spPr>
         <p:txBody>
           <a:bodyPr wrap="square" anchor="t" lIns="36576" rIns="36576" tIns="0" bIns="0">
@@ -5214,9 +5130,6 @@
             <a:avLst/>
           </a:prstGeom>
           <a:noFill/>
-          <a:ln>
-            <a:solidFill/>
-          </a:ln>
         </p:spPr>
         <p:txBody>
           <a:bodyPr wrap="square" anchor="t" lIns="36576" rIns="36576" tIns="0" bIns="0">
@@ -5252,9 +5165,6 @@
             <a:avLst/>
           </a:prstGeom>
           <a:noFill/>
-          <a:ln>
-            <a:solidFill/>
-          </a:ln>
         </p:spPr>
         <p:txBody>
           <a:bodyPr wrap="square" anchor="t" lIns="36576" rIns="36576" tIns="0" bIns="0">
@@ -5308,9 +5218,6 @@
             <a:avLst/>
           </a:prstGeom>
           <a:noFill/>
-          <a:ln>
-            <a:solidFill/>
-          </a:ln>
         </p:spPr>
         <p:txBody>
           <a:bodyPr wrap="square" anchor="ctr" lIns="36576" rIns="36576" tIns="0" bIns="0">
@@ -5346,9 +5253,6 @@
             <a:avLst/>
           </a:prstGeom>
           <a:noFill/>
-          <a:ln>
-            <a:solidFill/>
-          </a:ln>
         </p:spPr>
         <p:txBody>
           <a:bodyPr wrap="square" anchor="t" lIns="36576" rIns="36576" tIns="0" bIns="0">
@@ -5430,9 +5334,6 @@
             <a:avLst/>
           </a:prstGeom>
           <a:noFill/>
-          <a:ln>
-            <a:solidFill/>
-          </a:ln>
         </p:spPr>
         <p:txBody>
           <a:bodyPr wrap="square" anchor="t" lIns="36576" rIns="36576" tIns="0" bIns="0">
@@ -5514,9 +5415,6 @@
             <a:avLst/>
           </a:prstGeom>
           <a:noFill/>
-          <a:ln>
-            <a:solidFill/>
-          </a:ln>
         </p:spPr>
         <p:txBody>
           <a:bodyPr wrap="square" anchor="t" lIns="36576" rIns="36576" tIns="0" bIns="0">
@@ -5598,9 +5496,6 @@
             <a:avLst/>
           </a:prstGeom>
           <a:noFill/>
-          <a:ln>
-            <a:solidFill/>
-          </a:ln>
         </p:spPr>
         <p:txBody>
           <a:bodyPr wrap="square" anchor="t" lIns="36576" rIns="36576" tIns="0" bIns="0">
@@ -5682,9 +5577,6 @@
             <a:avLst/>
           </a:prstGeom>
           <a:noFill/>
-          <a:ln>
-            <a:solidFill/>
-          </a:ln>
         </p:spPr>
         <p:txBody>
           <a:bodyPr wrap="square" anchor="t" lIns="36576" rIns="36576" tIns="0" bIns="0">
@@ -6939,9 +6831,6 @@
             <a:avLst/>
           </a:prstGeom>
           <a:noFill/>
-          <a:ln>
-            <a:solidFill/>
-          </a:ln>
         </p:spPr>
         <p:txBody>
           <a:bodyPr wrap="square" anchor="t" lIns="36576" rIns="36576" tIns="0" bIns="0">
@@ -6977,9 +6866,6 @@
             <a:avLst/>
           </a:prstGeom>
           <a:noFill/>
-          <a:ln>
-            <a:solidFill/>
-          </a:ln>
         </p:spPr>
         <p:txBody>
           <a:bodyPr wrap="square" anchor="t" lIns="36576" rIns="36576" tIns="0" bIns="0">
@@ -7033,9 +6919,6 @@
             <a:avLst/>
           </a:prstGeom>
           <a:noFill/>
-          <a:ln>
-            <a:solidFill/>
-          </a:ln>
         </p:spPr>
         <p:txBody>
           <a:bodyPr wrap="square" anchor="ctr" lIns="36576" rIns="36576" tIns="0" bIns="0">
@@ -7071,9 +6954,6 @@
             <a:avLst/>
           </a:prstGeom>
           <a:noFill/>
-          <a:ln>
-            <a:solidFill/>
-          </a:ln>
         </p:spPr>
         <p:txBody>
           <a:bodyPr wrap="square" anchor="t" lIns="36576" rIns="36576" tIns="0" bIns="0">
@@ -7089,7 +6969,7 @@
                 </a:solidFill>
                 <a:latin typeface="맑은 고딕"/>
               </a:rPr>
-              <a:t>완료는 설비 신호로만 판정한다. 시간 기반 자동 완료(체류 복구)는 2026-09-17 폐기했다.</a:t>
+              <a:t>완료는 설비 신호로만 판정한다. 시간 기반 자동 완료는 폐기했다(체류 복구 2026-09-17, 환경설정 옵션 2026-09-21).</a:t>
             </a:r>
           </a:p>
         </p:txBody>
@@ -7164,9 +7044,6 @@
             <a:avLst/>
           </a:prstGeom>
           <a:noFill/>
-          <a:ln>
-            <a:solidFill/>
-          </a:ln>
         </p:spPr>
         <p:txBody>
           <a:bodyPr wrap="square" anchor="t" lIns="36576" rIns="36576" tIns="0" bIns="0">
@@ -7242,7 +7119,7 @@
           </a:solidFill>
           <a:ln w="15875">
             <a:solidFill>
-              <a:srgbClr val="595959"/>
+              <a:srgbClr val="23794A"/>
             </a:solidFill>
           </a:ln>
           <a:effectLst/>
@@ -7273,7 +7150,7 @@
                 </a:solidFill>
                 <a:latin typeface="맑은 고딕"/>
               </a:rPr>
-              <a:t>CleanupAutoTimeSets()</a:t>
+              <a:t>ConsumeForceComplete()</a:t>
             </a:r>
           </a:p>
         </p:txBody>
@@ -7293,9 +7170,6 @@
             <a:avLst/>
           </a:prstGeom>
           <a:noFill/>
-          <a:ln>
-            <a:solidFill/>
-          </a:ln>
         </p:spPr>
         <p:txBody>
           <a:bodyPr wrap="square" anchor="t" lIns="36576" rIns="36576" tIns="0" bIns="0">
@@ -7311,7 +7185,7 @@
                 </a:solidFill>
                 <a:latin typeface="맑은 고딕"/>
               </a:rPr>
-              <a:t>JOB_MST 에 없는 작업번호를 시간 기반 허용·사용 이력에서 지운다</a:t>
+              <a:t>운전 화면 [강제완료](FCMP) 소비 → ForceCompleteSc() 25→29 / ForceCompleteRtv() 35→39</a:t>
             </a:r>
           </a:p>
         </p:txBody>
@@ -7371,7 +7245,7 @@
           </a:solidFill>
           <a:ln w="15875">
             <a:solidFill>
-              <a:srgbClr val="595959"/>
+              <a:srgbClr val="23794A"/>
             </a:solidFill>
           </a:ln>
           <a:effectLst/>
@@ -7402,7 +7276,7 @@
                 </a:solidFill>
                 <a:latin typeface="맑은 고딕"/>
               </a:rPr>
-              <a:t>AutoTimeProcEnabled()</a:t>
+              <a:t>  ForceCompleteSc() / ForceCompleteRtv()</a:t>
             </a:r>
           </a:p>
         </p:txBody>
@@ -7422,9 +7296,6 @@
             <a:avLst/>
           </a:prstGeom>
           <a:noFill/>
-          <a:ln>
-            <a:solidFill/>
-          </a:ln>
         </p:spPr>
         <p:txBody>
           <a:bodyPr wrap="square" anchor="t" lIns="36576" rIns="36576" tIns="0" bIns="0">
@@ -7440,7 +7311,7 @@
                 </a:solidFill>
                 <a:latin typeface="맑은 고딕"/>
               </a:rPr>
-              <a:t>COMMON_CODE SCH_OPT/AUTO_TIME = 'Y' 일 때만 CompleteSC/CompleteRGVReal 의 경과시간 분기를 연다(기본 N)</a:t>
+              <a:t>설비가 화물을 들고 있으면 처리하지 않는다 (사람이 이미 내려놓았다는 전제)</a:t>
             </a:r>
           </a:p>
         </p:txBody>
@@ -7500,7 +7371,7 @@
           </a:solidFill>
           <a:ln w="15875">
             <a:solidFill>
-              <a:srgbClr val="23794A"/>
+              <a:srgbClr val="B5720A"/>
             </a:solidFill>
           </a:ln>
           <a:effectLst/>
@@ -7531,7 +7402,7 @@
                 </a:solidFill>
                 <a:latin typeface="맑은 고딕"/>
               </a:rPr>
-              <a:t>ConsumeForceComplete()</a:t>
+              <a:t>SweepOrphanVehicleData()</a:t>
             </a:r>
           </a:p>
         </p:txBody>
@@ -7551,9 +7422,6 @@
             <a:avLst/>
           </a:prstGeom>
           <a:noFill/>
-          <a:ln>
-            <a:solidFill/>
-          </a:ln>
         </p:spPr>
         <p:txBody>
           <a:bodyPr wrap="square" anchor="t" lIns="36576" rIns="36576" tIns="0" bIns="0">
@@ -7569,7 +7437,7 @@
                 </a:solidFill>
                 <a:latin typeface="맑은 고딕"/>
               </a:rPr>
-              <a:t>운전 화면 [강제완료](FCMP) 소비 → ForceCompleteSc() 25→29 / ForceCompleteRtv() 35→39</a:t>
+              <a:t>지시 소비 · 차상 빔 · 유휴 · JOB_MST 에 없음 → ClearRvData() / ClearScOd() / ResetScComplete()</a:t>
             </a:r>
           </a:p>
         </p:txBody>
@@ -7629,7 +7497,7 @@
           </a:solidFill>
           <a:ln w="15875">
             <a:solidFill>
-              <a:srgbClr val="23794A"/>
+              <a:srgbClr val="B5720A"/>
             </a:solidFill>
           </a:ln>
           <a:effectLst/>
@@ -7660,7 +7528,7 @@
                 </a:solidFill>
                 <a:latin typeface="맑은 고딕"/>
               </a:rPr>
-              <a:t>  ForceCompleteSc() / ForceCompleteRtv()</a:t>
+              <a:t>CompleteRGVManual() / CompleteSCManual()</a:t>
             </a:r>
           </a:p>
         </p:txBody>
@@ -7680,9 +7548,6 @@
             <a:avLst/>
           </a:prstGeom>
           <a:noFill/>
-          <a:ln>
-            <a:solidFill/>
-          </a:ln>
         </p:spPr>
         <p:txBody>
           <a:bodyPr wrap="square" anchor="t" lIns="36576" rIns="36576" tIns="0" bIns="0">
@@ -7698,7 +7563,7 @@
                 </a:solidFill>
                 <a:latin typeface="맑은 고딕"/>
               </a:rPr>
-              <a:t>설비가 화물을 들고 있으면 처리하지 않는다 (사람이 이미 내려놓았다는 전제)</a:t>
+              <a:t>수동지시 9998 / 9999 완료 신호 → 지시 흔적 정리, 이력 로그</a:t>
             </a:r>
           </a:p>
         </p:txBody>
@@ -7758,7 +7623,7 @@
           </a:solidFill>
           <a:ln w="15875">
             <a:solidFill>
-              <a:srgbClr val="B5720A"/>
+              <a:srgbClr val="1B5FB0"/>
             </a:solidFill>
           </a:ln>
           <a:effectLst/>
@@ -7789,7 +7654,7 @@
                 </a:solidFill>
                 <a:latin typeface="맑은 고딕"/>
               </a:rPr>
-              <a:t>SweepOrphanVehicleData()</a:t>
+              <a:t>DeleteJobNow()</a:t>
             </a:r>
           </a:p>
         </p:txBody>
@@ -7809,9 +7674,6 @@
             <a:avLst/>
           </a:prstGeom>
           <a:noFill/>
-          <a:ln>
-            <a:solidFill/>
-          </a:ln>
         </p:spPr>
         <p:txBody>
           <a:bodyPr wrap="square" anchor="t" lIns="36576" rIns="36576" tIns="0" bIns="0">
@@ -7827,120 +7689,26 @@
                 </a:solidFill>
                 <a:latin typeface="맑은 고딕"/>
               </a:rPr>
-              <a:t>지시 소비 · 차상 빔 · 유휴 · JOB_MST 에 없음 → ClearRvData() / ClearScOd() / ResetScComplete()</a:t>
-            </a:r>
-          </a:p>
-        </p:txBody>
-      </p:sp>
-      <p:cxnSp>
-        <p:nvCxnSpPr>
-          <p:cNvPr id="21" name="Connector 20"/>
-          <p:cNvCxnSpPr/>
-          <p:nvPr/>
-        </p:nvCxnSpPr>
-        <p:spPr>
-          <a:xfrm>
-            <a:off x="2377440" y="4718304"/>
-            <a:ext cx="0" cy="91440"/>
-          </a:xfrm>
-          <a:prstGeom prst="line">
-            <a:avLst/>
-          </a:prstGeom>
-          <a:ln w="15875">
-            <a:solidFill>
-              <a:srgbClr val="B6BFD0"/>
-            </a:solidFill>
-            <a:tailEnd type="triangle" w="med" len="med"/>
-          </a:ln>
-        </p:spPr>
-        <p:style>
-          <a:lnRef idx="2">
-            <a:schemeClr val="accent1"/>
-          </a:lnRef>
-          <a:fillRef idx="0">
-            <a:schemeClr val="accent1"/>
-          </a:fillRef>
-          <a:effectRef idx="1">
-            <a:schemeClr val="accent1"/>
-          </a:effectRef>
-          <a:fontRef idx="minor">
-            <a:schemeClr val="tx1"/>
-          </a:fontRef>
-        </p:style>
-      </p:cxnSp>
-      <p:sp>
-        <p:nvSpPr>
-          <p:cNvPr id="22" name="Rounded Rectangle 21"/>
-          <p:cNvSpPr/>
-          <p:nvPr/>
-        </p:nvSpPr>
-        <p:spPr>
-          <a:xfrm>
-            <a:off x="411480" y="4809744"/>
-            <a:ext cx="3931920" cy="512064"/>
-          </a:xfrm>
-          <a:prstGeom prst="roundRect">
-            <a:avLst/>
-          </a:prstGeom>
-          <a:solidFill>
-            <a:srgbClr val="FFFFFF"/>
-          </a:solidFill>
-          <a:ln w="15875">
-            <a:solidFill>
-              <a:srgbClr val="B5720A"/>
-            </a:solidFill>
-          </a:ln>
-          <a:effectLst/>
-        </p:spPr>
-        <p:style>
-          <a:lnRef idx="1">
-            <a:schemeClr val="accent1"/>
-          </a:lnRef>
-          <a:fillRef idx="3">
-            <a:schemeClr val="accent1"/>
-          </a:fillRef>
-          <a:effectRef idx="2">
-            <a:schemeClr val="accent1"/>
-          </a:effectRef>
-          <a:fontRef idx="minor">
-            <a:schemeClr val="lt1"/>
-          </a:fontRef>
-        </p:style>
-        <p:txBody>
-          <a:bodyPr rtlCol="0" anchor="ctr" wrap="square" lIns="64008" rIns="64008" tIns="0" bIns="0"/>
-          <a:lstStyle/>
-          <a:p>
-            <a:pPr algn="ctr"/>
-            <a:r>
-              <a:rPr sz="1000" b="1">
-                <a:solidFill>
-                  <a:srgbClr val="1E2761"/>
-                </a:solidFill>
-                <a:latin typeface="맑은 고딕"/>
-              </a:rPr>
-              <a:t>CompleteRGVManual() / CompleteSCManual()</a:t>
-            </a:r>
-          </a:p>
-        </p:txBody>
-      </p:sp>
-      <p:sp>
-        <p:nvSpPr>
-          <p:cNvPr id="23" name="TextBox 22"/>
+              <a:t>반자동 입고(11) 크레인 완료 · 반자동 출고(12) RTV 도착 기록 확인 시 즉시 삭제 (상위 보고 없음)</a:t>
+            </a:r>
+          </a:p>
+        </p:txBody>
+      </p:sp>
+      <p:sp>
+        <p:nvSpPr>
+          <p:cNvPr id="21" name="TextBox 20"/>
           <p:cNvSpPr txBox="1"/>
           <p:nvPr/>
         </p:nvSpPr>
         <p:spPr>
           <a:xfrm>
-            <a:off x="4498848" y="4882896"/>
-            <a:ext cx="7315200" cy="411480"/>
+            <a:off x="411480" y="6053328"/>
+            <a:ext cx="11384280" cy="320040"/>
           </a:xfrm>
           <a:prstGeom prst="rect">
             <a:avLst/>
           </a:prstGeom>
           <a:noFill/>
-          <a:ln>
-            <a:solidFill/>
-          </a:ln>
         </p:spPr>
         <p:txBody>
           <a:bodyPr wrap="square" anchor="t" lIns="36576" rIns="36576" tIns="0" bIns="0">
@@ -7952,124 +7720,30 @@
             <a:r>
               <a:rPr sz="950" b="0">
                 <a:solidFill>
-                  <a:srgbClr val="595959"/>
-                </a:solidFill>
-                <a:latin typeface="맑은 고딕"/>
-              </a:rPr>
-              <a:t>수동지시 9998 / 9999 완료 신호 → 지시 흔적 정리, 이력 로그</a:t>
-            </a:r>
-          </a:p>
-        </p:txBody>
-      </p:sp>
-      <p:cxnSp>
-        <p:nvCxnSpPr>
-          <p:cNvPr id="24" name="Connector 23"/>
-          <p:cNvCxnSpPr/>
-          <p:nvPr/>
-        </p:nvCxnSpPr>
-        <p:spPr>
-          <a:xfrm>
-            <a:off x="2377440" y="5321808"/>
-            <a:ext cx="0" cy="91440"/>
-          </a:xfrm>
-          <a:prstGeom prst="line">
-            <a:avLst/>
-          </a:prstGeom>
-          <a:ln w="15875">
-            <a:solidFill>
-              <a:srgbClr val="B6BFD0"/>
-            </a:solidFill>
-            <a:tailEnd type="triangle" w="med" len="med"/>
-          </a:ln>
-        </p:spPr>
-        <p:style>
-          <a:lnRef idx="2">
-            <a:schemeClr val="accent1"/>
-          </a:lnRef>
-          <a:fillRef idx="0">
-            <a:schemeClr val="accent1"/>
-          </a:fillRef>
-          <a:effectRef idx="1">
-            <a:schemeClr val="accent1"/>
-          </a:effectRef>
-          <a:fontRef idx="minor">
-            <a:schemeClr val="tx1"/>
-          </a:fontRef>
-        </p:style>
-      </p:cxnSp>
-      <p:sp>
-        <p:nvSpPr>
-          <p:cNvPr id="25" name="Rounded Rectangle 24"/>
-          <p:cNvSpPr/>
-          <p:nvPr/>
-        </p:nvSpPr>
-        <p:spPr>
-          <a:xfrm>
-            <a:off x="411480" y="5413248"/>
-            <a:ext cx="3931920" cy="512064"/>
-          </a:xfrm>
-          <a:prstGeom prst="roundRect">
-            <a:avLst/>
-          </a:prstGeom>
-          <a:solidFill>
-            <a:srgbClr val="FFFFFF"/>
-          </a:solidFill>
-          <a:ln w="15875">
-            <a:solidFill>
-              <a:srgbClr val="1B5FB0"/>
-            </a:solidFill>
-          </a:ln>
-          <a:effectLst/>
-        </p:spPr>
-        <p:style>
-          <a:lnRef idx="1">
-            <a:schemeClr val="accent1"/>
-          </a:lnRef>
-          <a:fillRef idx="3">
-            <a:schemeClr val="accent1"/>
-          </a:fillRef>
-          <a:effectRef idx="2">
-            <a:schemeClr val="accent1"/>
-          </a:effectRef>
-          <a:fontRef idx="minor">
-            <a:schemeClr val="lt1"/>
-          </a:fontRef>
-        </p:style>
-        <p:txBody>
-          <a:bodyPr rtlCol="0" anchor="ctr" wrap="square" lIns="64008" rIns="64008" tIns="0" bIns="0"/>
-          <a:lstStyle/>
-          <a:p>
-            <a:pPr algn="ctr"/>
-            <a:r>
-              <a:rPr sz="1000" b="1">
-                <a:solidFill>
-                  <a:srgbClr val="1E2761"/>
-                </a:solidFill>
-                <a:latin typeface="맑은 고딕"/>
-              </a:rPr>
-              <a:t>DeleteJobNow()</a:t>
-            </a:r>
-          </a:p>
-        </p:txBody>
-      </p:sp>
-      <p:sp>
-        <p:nvSpPr>
-          <p:cNvPr id="26" name="TextBox 25"/>
+                  <a:srgbClr val="B02E2E"/>
+                </a:solidFill>
+                <a:latin typeface="맑은 고딕"/>
+              </a:rPr>
+              <a:t>※ 체류 경고가 뜨면 설비 상태와 화물 위치를 사람이 확인한다. 작업정보를 자동으로 지우면 실물 위치를 되찾을 길이 없다(유령 재고 방지).</a:t>
+            </a:r>
+          </a:p>
+        </p:txBody>
+      </p:sp>
+      <p:sp>
+        <p:nvSpPr>
+          <p:cNvPr id="22" name="TextBox 21"/>
           <p:cNvSpPr txBox="1"/>
           <p:nvPr/>
         </p:nvSpPr>
         <p:spPr>
           <a:xfrm>
-            <a:off x="4498848" y="5486400"/>
-            <a:ext cx="7315200" cy="411480"/>
+            <a:off x="411480" y="6446520"/>
+            <a:ext cx="6400800" cy="274320"/>
           </a:xfrm>
           <a:prstGeom prst="rect">
             <a:avLst/>
           </a:prstGeom>
           <a:noFill/>
-          <a:ln>
-            <a:solidFill/>
-          </a:ln>
         </p:spPr>
         <p:txBody>
           <a:bodyPr wrap="square" anchor="t" lIns="36576" rIns="36576" tIns="0" bIns="0">
@@ -8079,88 +7753,12 @@
           <a:p>
             <a:pPr algn="l"/>
             <a:r>
-              <a:rPr sz="950" b="0">
+              <a:rPr sz="900" b="0">
                 <a:solidFill>
                   <a:srgbClr val="595959"/>
                 </a:solidFill>
                 <a:latin typeface="맑은 고딕"/>
               </a:rPr>
-              <a:t>반자동 입고(11) 크레인 완료 · 반자동 출고(12) RTV 도착 기록 확인 시 즉시 삭제 (상위 보고 없음)</a:t>
-            </a:r>
-          </a:p>
-        </p:txBody>
-      </p:sp>
-      <p:sp>
-        <p:nvSpPr>
-          <p:cNvPr id="27" name="TextBox 26"/>
-          <p:cNvSpPr txBox="1"/>
-          <p:nvPr/>
-        </p:nvSpPr>
-        <p:spPr>
-          <a:xfrm>
-            <a:off x="411480" y="6053328"/>
-            <a:ext cx="11384280" cy="320040"/>
-          </a:xfrm>
-          <a:prstGeom prst="rect">
-            <a:avLst/>
-          </a:prstGeom>
-          <a:noFill/>
-          <a:ln>
-            <a:solidFill/>
-          </a:ln>
-        </p:spPr>
-        <p:txBody>
-          <a:bodyPr wrap="square" anchor="t" lIns="36576" rIns="36576" tIns="0" bIns="0">
-            <a:spAutoFit/>
-          </a:bodyPr>
-          <a:lstStyle/>
-          <a:p>
-            <a:pPr algn="l"/>
-            <a:r>
-              <a:rPr sz="950" b="0">
-                <a:solidFill>
-                  <a:srgbClr val="B02E2E"/>
-                </a:solidFill>
-                <a:latin typeface="맑은 고딕"/>
-              </a:rPr>
-              <a:t>※ 체류 경고가 뜨면 설비 상태와 화물 위치를 사람이 확인한다. 작업정보를 자동으로 지우면 실물 위치를 되찾을 길이 없다(유령 재고 방지).</a:t>
-            </a:r>
-          </a:p>
-        </p:txBody>
-      </p:sp>
-      <p:sp>
-        <p:nvSpPr>
-          <p:cNvPr id="28" name="TextBox 27"/>
-          <p:cNvSpPr txBox="1"/>
-          <p:nvPr/>
-        </p:nvSpPr>
-        <p:spPr>
-          <a:xfrm>
-            <a:off x="411480" y="6446520"/>
-            <a:ext cx="6400800" cy="274320"/>
-          </a:xfrm>
-          <a:prstGeom prst="rect">
-            <a:avLst/>
-          </a:prstGeom>
-          <a:noFill/>
-          <a:ln>
-            <a:solidFill/>
-          </a:ln>
-        </p:spPr>
-        <p:txBody>
-          <a:bodyPr wrap="square" anchor="t" lIns="36576" rIns="36576" tIns="0" bIns="0">
-            <a:spAutoFit/>
-          </a:bodyPr>
-          <a:lstStyle/>
-          <a:p>
-            <a:pPr algn="l"/>
-            <a:r>
-              <a:rPr sz="900" b="0">
-                <a:solidFill>
-                  <a:srgbClr val="595959"/>
-                </a:solidFill>
-                <a:latin typeface="맑은 고딕"/>
-              </a:rPr>
               <a:t>LG 화학 1동 ECS  |  예외 · 정리 함수</a:t>
             </a:r>
           </a:p>
@@ -8168,7 +7766,7 @@
       </p:sp>
       <p:sp>
         <p:nvSpPr>
-          <p:cNvPr id="29" name="TextBox 28"/>
+          <p:cNvPr id="23" name="TextBox 22"/>
           <p:cNvSpPr txBox="1"/>
           <p:nvPr/>
         </p:nvSpPr>
@@ -8181,9 +7779,6 @@
             <a:avLst/>
           </a:prstGeom>
           <a:noFill/>
-          <a:ln>
-            <a:solidFill/>
-          </a:ln>
         </p:spPr>
         <p:txBody>
           <a:bodyPr wrap="square" anchor="t" lIns="36576" rIns="36576" tIns="0" bIns="0">
@@ -8237,9 +7832,6 @@
             <a:avLst/>
           </a:prstGeom>
           <a:noFill/>
-          <a:ln>
-            <a:solidFill/>
-          </a:ln>
         </p:spPr>
         <p:txBody>
           <a:bodyPr wrap="square" anchor="ctr" lIns="36576" rIns="36576" tIns="0" bIns="0">
@@ -8573,9 +8165,6 @@
             <a:avLst/>
           </a:prstGeom>
           <a:noFill/>
-          <a:ln>
-            <a:solidFill/>
-          </a:ln>
         </p:spPr>
         <p:txBody>
           <a:bodyPr wrap="square" anchor="t" lIns="36576" rIns="36576" tIns="0" bIns="0">
@@ -8611,9 +8200,6 @@
             <a:avLst/>
           </a:prstGeom>
           <a:noFill/>
-          <a:ln>
-            <a:solidFill/>
-          </a:ln>
         </p:spPr>
         <p:txBody>
           <a:bodyPr wrap="square" anchor="t" lIns="36576" rIns="36576" tIns="0" bIns="0">
@@ -8667,9 +8253,6 @@
             <a:avLst/>
           </a:prstGeom>
           <a:noFill/>
-          <a:ln>
-            <a:solidFill/>
-          </a:ln>
         </p:spPr>
         <p:txBody>
           <a:bodyPr wrap="square" anchor="ctr" lIns="36576" rIns="36576" tIns="0" bIns="0">
@@ -8705,9 +8288,6 @@
             <a:avLst/>
           </a:prstGeom>
           <a:noFill/>
-          <a:ln>
-            <a:solidFill/>
-          </a:ln>
         </p:spPr>
         <p:txBody>
           <a:bodyPr wrap="square" anchor="t" lIns="36576" rIns="36576" tIns="0" bIns="0">
@@ -9534,9 +9114,6 @@
             <a:avLst/>
           </a:prstGeom>
           <a:noFill/>
-          <a:ln>
-            <a:solidFill/>
-          </a:ln>
         </p:spPr>
         <p:txBody>
           <a:bodyPr wrap="square" anchor="t" lIns="36576" rIns="36576" tIns="0" bIns="0">
@@ -9656,9 +9233,6 @@
             <a:avLst/>
           </a:prstGeom>
           <a:noFill/>
-          <a:ln>
-            <a:solidFill/>
-          </a:ln>
         </p:spPr>
         <p:txBody>
           <a:bodyPr wrap="square" anchor="t" lIns="36576" rIns="36576" tIns="0" bIns="0">
@@ -9814,9 +9388,6 @@
             <a:avLst/>
           </a:prstGeom>
           <a:noFill/>
-          <a:ln>
-            <a:solidFill/>
-          </a:ln>
         </p:spPr>
         <p:txBody>
           <a:bodyPr wrap="square" anchor="t" lIns="36576" rIns="36576" tIns="0" bIns="0">
@@ -9852,9 +9423,6 @@
             <a:avLst/>
           </a:prstGeom>
           <a:noFill/>
-          <a:ln>
-            <a:solidFill/>
-          </a:ln>
         </p:spPr>
         <p:txBody>
           <a:bodyPr wrap="square" anchor="t" lIns="36576" rIns="36576" tIns="0" bIns="0">
@@ -9908,9 +9476,6 @@
             <a:avLst/>
           </a:prstGeom>
           <a:noFill/>
-          <a:ln>
-            <a:solidFill/>
-          </a:ln>
         </p:spPr>
         <p:txBody>
           <a:bodyPr wrap="square" anchor="ctr" lIns="36576" rIns="36576" tIns="0" bIns="0">
@@ -9946,9 +9511,6 @@
             <a:avLst/>
           </a:prstGeom>
           <a:noFill/>
-          <a:ln>
-            <a:solidFill/>
-          </a:ln>
         </p:spPr>
         <p:txBody>
           <a:bodyPr wrap="square" anchor="t" lIns="36576" rIns="36576" tIns="0" bIns="0">
@@ -10030,9 +9592,6 @@
             <a:avLst/>
           </a:prstGeom>
           <a:noFill/>
-          <a:ln>
-            <a:solidFill/>
-          </a:ln>
         </p:spPr>
         <p:txBody>
           <a:bodyPr wrap="square" anchor="t" lIns="36576" rIns="36576" tIns="0" bIns="0">
@@ -10114,9 +9673,6 @@
             <a:avLst/>
           </a:prstGeom>
           <a:noFill/>
-          <a:ln>
-            <a:solidFill/>
-          </a:ln>
         </p:spPr>
         <p:txBody>
           <a:bodyPr wrap="square" anchor="t" lIns="36576" rIns="36576" tIns="0" bIns="0">
@@ -10198,9 +9754,6 @@
             <a:avLst/>
           </a:prstGeom>
           <a:noFill/>
-          <a:ln>
-            <a:solidFill/>
-          </a:ln>
         </p:spPr>
         <p:txBody>
           <a:bodyPr wrap="square" anchor="t" lIns="36576" rIns="36576" tIns="0" bIns="0">
@@ -10282,9 +9835,6 @@
             <a:avLst/>
           </a:prstGeom>
           <a:noFill/>
-          <a:ln>
-            <a:solidFill/>
-          </a:ln>
         </p:spPr>
         <p:txBody>
           <a:bodyPr wrap="square" anchor="t" lIns="36576" rIns="36576" tIns="0" bIns="0">
@@ -12495,9 +12045,6 @@
             <a:avLst/>
           </a:prstGeom>
           <a:noFill/>
-          <a:ln>
-            <a:solidFill/>
-          </a:ln>
         </p:spPr>
         <p:txBody>
           <a:bodyPr wrap="square" anchor="t" lIns="36576" rIns="36576" tIns="0" bIns="0">
@@ -12533,9 +12080,6 @@
             <a:avLst/>
           </a:prstGeom>
           <a:noFill/>
-          <a:ln>
-            <a:solidFill/>
-          </a:ln>
         </p:spPr>
         <p:txBody>
           <a:bodyPr wrap="square" anchor="t" lIns="36576" rIns="36576" tIns="0" bIns="0">
@@ -12589,9 +12133,6 @@
             <a:avLst/>
           </a:prstGeom>
           <a:noFill/>
-          <a:ln>
-            <a:solidFill/>
-          </a:ln>
         </p:spPr>
         <p:txBody>
           <a:bodyPr wrap="square" anchor="ctr" lIns="36576" rIns="36576" tIns="0" bIns="0">
@@ -12627,9 +12168,6 @@
             <a:avLst/>
           </a:prstGeom>
           <a:noFill/>
-          <a:ln>
-            <a:solidFill/>
-          </a:ln>
         </p:spPr>
         <p:txBody>
           <a:bodyPr wrap="square" anchor="t" lIns="36576" rIns="36576" tIns="0" bIns="0">
@@ -12711,9 +12249,6 @@
             <a:avLst/>
           </a:prstGeom>
           <a:noFill/>
-          <a:ln>
-            <a:solidFill/>
-          </a:ln>
         </p:spPr>
         <p:txBody>
           <a:bodyPr wrap="square" anchor="t" lIns="36576" rIns="36576" tIns="0" bIns="0">
@@ -12795,9 +12330,6 @@
             <a:avLst/>
           </a:prstGeom>
           <a:noFill/>
-          <a:ln>
-            <a:solidFill/>
-          </a:ln>
         </p:spPr>
         <p:txBody>
           <a:bodyPr wrap="square" anchor="t" lIns="36576" rIns="36576" tIns="0" bIns="0">
@@ -12879,9 +12411,6 @@
             <a:avLst/>
           </a:prstGeom>
           <a:noFill/>
-          <a:ln>
-            <a:solidFill/>
-          </a:ln>
         </p:spPr>
         <p:txBody>
           <a:bodyPr wrap="square" anchor="t" lIns="36576" rIns="36576" tIns="0" bIns="0">
@@ -12963,9 +12492,6 @@
             <a:avLst/>
           </a:prstGeom>
           <a:noFill/>
-          <a:ln>
-            <a:solidFill/>
-          </a:ln>
         </p:spPr>
         <p:txBody>
           <a:bodyPr wrap="square" anchor="t" lIns="36576" rIns="36576" tIns="0" bIns="0">
@@ -15188,9 +14714,6 @@
             <a:avLst/>
           </a:prstGeom>
           <a:noFill/>
-          <a:ln>
-            <a:solidFill/>
-          </a:ln>
         </p:spPr>
         <p:txBody>
           <a:bodyPr wrap="square" anchor="t" lIns="36576" rIns="36576" tIns="0" bIns="0">
@@ -15226,9 +14749,6 @@
             <a:avLst/>
           </a:prstGeom>
           <a:noFill/>
-          <a:ln>
-            <a:solidFill/>
-          </a:ln>
         </p:spPr>
         <p:txBody>
           <a:bodyPr wrap="square" anchor="t" lIns="36576" rIns="36576" tIns="0" bIns="0">
@@ -15282,9 +14802,6 @@
             <a:avLst/>
           </a:prstGeom>
           <a:noFill/>
-          <a:ln>
-            <a:solidFill/>
-          </a:ln>
         </p:spPr>
         <p:txBody>
           <a:bodyPr wrap="square" anchor="ctr" lIns="36576" rIns="36576" tIns="0" bIns="0">
@@ -15320,9 +14837,6 @@
             <a:avLst/>
           </a:prstGeom>
           <a:noFill/>
-          <a:ln>
-            <a:solidFill/>
-          </a:ln>
         </p:spPr>
         <p:txBody>
           <a:bodyPr wrap="square" anchor="t" lIns="36576" rIns="36576" tIns="0" bIns="0">
@@ -15413,9 +14927,6 @@
             <a:avLst/>
           </a:prstGeom>
           <a:noFill/>
-          <a:ln>
-            <a:solidFill/>
-          </a:ln>
         </p:spPr>
         <p:txBody>
           <a:bodyPr wrap="square" anchor="t" lIns="36576" rIns="36576" tIns="0" bIns="0">
@@ -15451,9 +14962,6 @@
             <a:avLst/>
           </a:prstGeom>
           <a:noFill/>
-          <a:ln>
-            <a:solidFill/>
-          </a:ln>
         </p:spPr>
         <p:txBody>
           <a:bodyPr wrap="square" anchor="t" lIns="36576" rIns="36576" tIns="0" bIns="0">
@@ -15544,9 +15052,6 @@
             <a:avLst/>
           </a:prstGeom>
           <a:noFill/>
-          <a:ln>
-            <a:solidFill/>
-          </a:ln>
         </p:spPr>
         <p:txBody>
           <a:bodyPr wrap="square" anchor="t" lIns="36576" rIns="36576" tIns="0" bIns="0">
@@ -15582,9 +15087,6 @@
             <a:avLst/>
           </a:prstGeom>
           <a:noFill/>
-          <a:ln>
-            <a:solidFill/>
-          </a:ln>
         </p:spPr>
         <p:txBody>
           <a:bodyPr wrap="square" anchor="t" lIns="36576" rIns="36576" tIns="0" bIns="0">
@@ -15620,9 +15122,6 @@
             <a:avLst/>
           </a:prstGeom>
           <a:noFill/>
-          <a:ln>
-            <a:solidFill/>
-          </a:ln>
         </p:spPr>
         <p:txBody>
           <a:bodyPr wrap="square" anchor="t" lIns="36576" rIns="36576" tIns="0" bIns="0">
@@ -15658,9 +15157,6 @@
             <a:avLst/>
           </a:prstGeom>
           <a:noFill/>
-          <a:ln>
-            <a:solidFill/>
-          </a:ln>
         </p:spPr>
         <p:txBody>
           <a:bodyPr wrap="square" anchor="t" lIns="36576" rIns="36576" tIns="0" bIns="0">
@@ -15696,9 +15192,6 @@
             <a:avLst/>
           </a:prstGeom>
           <a:noFill/>
-          <a:ln>
-            <a:solidFill/>
-          </a:ln>
         </p:spPr>
         <p:txBody>
           <a:bodyPr wrap="square" anchor="t" lIns="36576" rIns="36576" tIns="0" bIns="0">
@@ -15734,9 +15227,6 @@
             <a:avLst/>
           </a:prstGeom>
           <a:noFill/>
-          <a:ln>
-            <a:solidFill/>
-          </a:ln>
         </p:spPr>
         <p:txBody>
           <a:bodyPr wrap="square" anchor="t" lIns="36576" rIns="36576" tIns="0" bIns="0">
@@ -15772,9 +15262,6 @@
             <a:avLst/>
           </a:prstGeom>
           <a:noFill/>
-          <a:ln>
-            <a:solidFill/>
-          </a:ln>
         </p:spPr>
         <p:txBody>
           <a:bodyPr wrap="square" anchor="t" lIns="36576" rIns="36576" tIns="0" bIns="0">
@@ -15810,9 +15297,6 @@
             <a:avLst/>
           </a:prstGeom>
           <a:noFill/>
-          <a:ln>
-            <a:solidFill/>
-          </a:ln>
         </p:spPr>
         <p:txBody>
           <a:bodyPr wrap="square" anchor="t" lIns="36576" rIns="36576" tIns="0" bIns="0">
@@ -15848,9 +15332,6 @@
             <a:avLst/>
           </a:prstGeom>
           <a:noFill/>
-          <a:ln>
-            <a:solidFill/>
-          </a:ln>
         </p:spPr>
         <p:txBody>
           <a:bodyPr wrap="square" anchor="t" lIns="36576" rIns="36576" tIns="0" bIns="0">
@@ -15886,9 +15367,6 @@
             <a:avLst/>
           </a:prstGeom>
           <a:noFill/>
-          <a:ln>
-            <a:solidFill/>
-          </a:ln>
         </p:spPr>
         <p:txBody>
           <a:bodyPr wrap="square" anchor="t" lIns="36576" rIns="36576" tIns="0" bIns="0">
@@ -15979,9 +15457,6 @@
             <a:avLst/>
           </a:prstGeom>
           <a:noFill/>
-          <a:ln>
-            <a:solidFill/>
-          </a:ln>
         </p:spPr>
         <p:txBody>
           <a:bodyPr wrap="square" anchor="t" lIns="36576" rIns="36576" tIns="0" bIns="0">
@@ -16017,9 +15492,6 @@
             <a:avLst/>
           </a:prstGeom>
           <a:noFill/>
-          <a:ln>
-            <a:solidFill/>
-          </a:ln>
         </p:spPr>
         <p:txBody>
           <a:bodyPr wrap="square" anchor="t" lIns="36576" rIns="36576" tIns="0" bIns="0">
@@ -16055,9 +15527,6 @@
             <a:avLst/>
           </a:prstGeom>
           <a:noFill/>
-          <a:ln>
-            <a:solidFill/>
-          </a:ln>
         </p:spPr>
         <p:txBody>
           <a:bodyPr wrap="square" anchor="t" lIns="36576" rIns="36576" tIns="0" bIns="0">
@@ -16093,9 +15562,6 @@
             <a:avLst/>
           </a:prstGeom>
           <a:noFill/>
-          <a:ln>
-            <a:solidFill/>
-          </a:ln>
         </p:spPr>
         <p:txBody>
           <a:bodyPr wrap="square" anchor="t" lIns="36576" rIns="36576" tIns="0" bIns="0">
@@ -16238,7 +15704,7 @@
                 </a:solidFill>
                 <a:latin typeface="맑은 고딕"/>
               </a:rPr>
-              <a:t>※ 2026-09-17 미사용 함수 13개 삭제, 체류 복구(시간 기반 자동 완료) 폐기</a:t>
+              <a:t>※ 2026-09-17 미사용 함수 13개 삭제 / 2026-09-21 시간 기반 자동 완료 관련 함수 3개 삭제</a:t>
             </a:r>
           </a:p>
         </p:txBody>
@@ -16313,9 +15779,6 @@
             <a:avLst/>
           </a:prstGeom>
           <a:noFill/>
-          <a:ln>
-            <a:solidFill/>
-          </a:ln>
         </p:spPr>
         <p:txBody>
           <a:bodyPr wrap="square" anchor="t" lIns="36576" rIns="36576" tIns="0" bIns="0">
@@ -16351,9 +15814,6 @@
             <a:avLst/>
           </a:prstGeom>
           <a:noFill/>
-          <a:ln>
-            <a:solidFill/>
-          </a:ln>
         </p:spPr>
         <p:txBody>
           <a:bodyPr wrap="square" anchor="t" lIns="36576" rIns="36576" tIns="0" bIns="0">
@@ -16389,9 +15849,6 @@
             <a:avLst/>
           </a:prstGeom>
           <a:noFill/>
-          <a:ln>
-            <a:solidFill/>
-          </a:ln>
         </p:spPr>
         <p:txBody>
           <a:bodyPr wrap="square" anchor="t" lIns="36576" rIns="36576" tIns="0" bIns="0">
@@ -16427,9 +15884,6 @@
             <a:avLst/>
           </a:prstGeom>
           <a:noFill/>
-          <a:ln>
-            <a:solidFill/>
-          </a:ln>
         </p:spPr>
         <p:txBody>
           <a:bodyPr wrap="square" anchor="t" lIns="36576" rIns="36576" tIns="0" bIns="0">
@@ -16465,9 +15919,6 @@
             <a:avLst/>
           </a:prstGeom>
           <a:noFill/>
-          <a:ln>
-            <a:solidFill/>
-          </a:ln>
         </p:spPr>
         <p:txBody>
           <a:bodyPr wrap="square" anchor="t" lIns="36576" rIns="36576" tIns="0" bIns="0">
@@ -16503,9 +15954,6 @@
             <a:avLst/>
           </a:prstGeom>
           <a:noFill/>
-          <a:ln>
-            <a:solidFill/>
-          </a:ln>
         </p:spPr>
         <p:txBody>
           <a:bodyPr wrap="square" anchor="t" lIns="36576" rIns="36576" tIns="0" bIns="0">
@@ -16541,9 +15989,6 @@
             <a:avLst/>
           </a:prstGeom>
           <a:noFill/>
-          <a:ln>
-            <a:solidFill/>
-          </a:ln>
         </p:spPr>
         <p:txBody>
           <a:bodyPr wrap="square" anchor="t" lIns="36576" rIns="36576" tIns="0" bIns="0">
@@ -16579,9 +16024,6 @@
             <a:avLst/>
           </a:prstGeom>
           <a:noFill/>
-          <a:ln>
-            <a:solidFill/>
-          </a:ln>
         </p:spPr>
         <p:txBody>
           <a:bodyPr wrap="square" anchor="t" lIns="36576" rIns="36576" tIns="0" bIns="0">
@@ -16617,9 +16059,6 @@
             <a:avLst/>
           </a:prstGeom>
           <a:noFill/>
-          <a:ln>
-            <a:solidFill/>
-          </a:ln>
         </p:spPr>
         <p:txBody>
           <a:bodyPr wrap="square" anchor="t" lIns="36576" rIns="36576" tIns="0" bIns="0">
@@ -16655,9 +16094,6 @@
             <a:avLst/>
           </a:prstGeom>
           <a:noFill/>
-          <a:ln>
-            <a:solidFill/>
-          </a:ln>
         </p:spPr>
         <p:txBody>
           <a:bodyPr wrap="square" anchor="t" lIns="36576" rIns="36576" tIns="0" bIns="0">
@@ -16748,9 +16184,6 @@
             <a:avLst/>
           </a:prstGeom>
           <a:noFill/>
-          <a:ln>
-            <a:solidFill/>
-          </a:ln>
         </p:spPr>
         <p:txBody>
           <a:bodyPr wrap="square" anchor="t" lIns="36576" rIns="36576" tIns="0" bIns="0">
@@ -16786,9 +16219,6 @@
             <a:avLst/>
           </a:prstGeom>
           <a:noFill/>
-          <a:ln>
-            <a:solidFill/>
-          </a:ln>
         </p:spPr>
         <p:txBody>
           <a:bodyPr wrap="square" anchor="t" lIns="36576" rIns="36576" tIns="0" bIns="0">
@@ -16824,9 +16254,6 @@
             <a:avLst/>
           </a:prstGeom>
           <a:noFill/>
-          <a:ln>
-            <a:solidFill/>
-          </a:ln>
         </p:spPr>
         <p:txBody>
           <a:bodyPr wrap="square" anchor="t" lIns="36576" rIns="36576" tIns="0" bIns="0">
@@ -16862,9 +16289,6 @@
             <a:avLst/>
           </a:prstGeom>
           <a:noFill/>
-          <a:ln>
-            <a:solidFill/>
-          </a:ln>
         </p:spPr>
         <p:txBody>
           <a:bodyPr wrap="square" anchor="t" lIns="36576" rIns="36576" tIns="0" bIns="0">
@@ -16900,9 +16324,6 @@
             <a:avLst/>
           </a:prstGeom>
           <a:noFill/>
-          <a:ln>
-            <a:solidFill/>
-          </a:ln>
         </p:spPr>
         <p:txBody>
           <a:bodyPr wrap="square" anchor="t" lIns="36576" rIns="36576" tIns="0" bIns="0">
@@ -16938,9 +16359,6 @@
             <a:avLst/>
           </a:prstGeom>
           <a:noFill/>
-          <a:ln>
-            <a:solidFill/>
-          </a:ln>
         </p:spPr>
         <p:txBody>
           <a:bodyPr wrap="square" anchor="t" lIns="36576" rIns="36576" tIns="0" bIns="0">
@@ -16976,9 +16394,6 @@
             <a:avLst/>
           </a:prstGeom>
           <a:noFill/>
-          <a:ln>
-            <a:solidFill/>
-          </a:ln>
         </p:spPr>
         <p:txBody>
           <a:bodyPr wrap="square" anchor="t" lIns="36576" rIns="36576" tIns="0" bIns="0">
@@ -17014,9 +16429,6 @@
             <a:avLst/>
           </a:prstGeom>
           <a:noFill/>
-          <a:ln>
-            <a:solidFill/>
-          </a:ln>
         </p:spPr>
         <p:txBody>
           <a:bodyPr wrap="square" anchor="t" lIns="36576" rIns="36576" tIns="0" bIns="0">
@@ -17052,9 +16464,6 @@
             <a:avLst/>
           </a:prstGeom>
           <a:noFill/>
-          <a:ln>
-            <a:solidFill/>
-          </a:ln>
         </p:spPr>
         <p:txBody>
           <a:bodyPr wrap="square" anchor="t" lIns="36576" rIns="36576" tIns="0" bIns="0">
@@ -17090,9 +16499,6 @@
             <a:avLst/>
           </a:prstGeom>
           <a:noFill/>
-          <a:ln>
-            <a:solidFill/>
-          </a:ln>
         </p:spPr>
         <p:txBody>
           <a:bodyPr wrap="square" anchor="t" lIns="36576" rIns="36576" tIns="0" bIns="0">
@@ -17128,9 +16534,6 @@
             <a:avLst/>
           </a:prstGeom>
           <a:noFill/>
-          <a:ln>
-            <a:solidFill/>
-          </a:ln>
         </p:spPr>
         <p:txBody>
           <a:bodyPr wrap="square" anchor="t" lIns="36576" rIns="36576" tIns="0" bIns="0">
@@ -17166,9 +16569,6 @@
             <a:avLst/>
           </a:prstGeom>
           <a:noFill/>
-          <a:ln>
-            <a:solidFill/>
-          </a:ln>
         </p:spPr>
         <p:txBody>
           <a:bodyPr wrap="square" anchor="t" lIns="36576" rIns="36576" tIns="0" bIns="0">
@@ -17204,9 +16604,6 @@
             <a:avLst/>
           </a:prstGeom>
           <a:noFill/>
-          <a:ln>
-            <a:solidFill/>
-          </a:ln>
         </p:spPr>
         <p:txBody>
           <a:bodyPr wrap="square" anchor="t" lIns="36576" rIns="36576" tIns="0" bIns="0">
@@ -17242,9 +16639,6 @@
             <a:avLst/>
           </a:prstGeom>
           <a:noFill/>
-          <a:ln>
-            <a:solidFill/>
-          </a:ln>
         </p:spPr>
         <p:txBody>
           <a:bodyPr wrap="square" anchor="t" lIns="36576" rIns="36576" tIns="0" bIns="0">
@@ -17280,9 +16674,6 @@
             <a:avLst/>
           </a:prstGeom>
           <a:noFill/>
-          <a:ln>
-            <a:solidFill/>
-          </a:ln>
         </p:spPr>
         <p:txBody>
           <a:bodyPr wrap="square" anchor="t" lIns="36576" rIns="36576" tIns="0" bIns="0">
@@ -17342,9 +16733,6 @@
             <a:avLst/>
           </a:prstGeom>
           <a:noFill/>
-          <a:ln>
-            <a:solidFill/>
-          </a:ln>
         </p:spPr>
         <p:txBody>
           <a:bodyPr wrap="square" anchor="t" lIns="36576" rIns="36576" tIns="0" bIns="0">
@@ -17380,9 +16768,6 @@
             <a:avLst/>
           </a:prstGeom>
           <a:noFill/>
-          <a:ln>
-            <a:solidFill/>
-          </a:ln>
         </p:spPr>
         <p:txBody>
           <a:bodyPr wrap="square" anchor="t" lIns="36576" rIns="36576" tIns="0" bIns="0">
@@ -17436,9 +16821,6 @@
             <a:avLst/>
           </a:prstGeom>
           <a:noFill/>
-          <a:ln>
-            <a:solidFill/>
-          </a:ln>
         </p:spPr>
         <p:txBody>
           <a:bodyPr wrap="square" anchor="ctr" lIns="36576" rIns="36576" tIns="0" bIns="0">
@@ -17474,9 +16856,6 @@
             <a:avLst/>
           </a:prstGeom>
           <a:noFill/>
-          <a:ln>
-            <a:solidFill/>
-          </a:ln>
         </p:spPr>
         <p:txBody>
           <a:bodyPr wrap="square" anchor="t" lIns="36576" rIns="36576" tIns="0" bIns="0">
@@ -17558,9 +16937,6 @@
             <a:avLst/>
           </a:prstGeom>
           <a:noFill/>
-          <a:ln>
-            <a:solidFill/>
-          </a:ln>
         </p:spPr>
         <p:txBody>
           <a:bodyPr wrap="square" anchor="t" lIns="36576" rIns="36576" tIns="0" bIns="0">
@@ -17642,9 +17018,6 @@
             <a:avLst/>
           </a:prstGeom>
           <a:noFill/>
-          <a:ln>
-            <a:solidFill/>
-          </a:ln>
         </p:spPr>
         <p:txBody>
           <a:bodyPr wrap="square" anchor="t" lIns="36576" rIns="36576" tIns="0" bIns="0">
@@ -17726,9 +17099,6 @@
             <a:avLst/>
           </a:prstGeom>
           <a:noFill/>
-          <a:ln>
-            <a:solidFill/>
-          </a:ln>
         </p:spPr>
         <p:txBody>
           <a:bodyPr wrap="square" anchor="t" lIns="36576" rIns="36576" tIns="0" bIns="0">
@@ -17810,9 +17180,6 @@
             <a:avLst/>
           </a:prstGeom>
           <a:noFill/>
-          <a:ln>
-            <a:solidFill/>
-          </a:ln>
         </p:spPr>
         <p:txBody>
           <a:bodyPr wrap="square" anchor="t" lIns="36576" rIns="36576" tIns="0" bIns="0">
@@ -19460,9 +18827,6 @@
             <a:avLst/>
           </a:prstGeom>
           <a:noFill/>
-          <a:ln>
-            <a:solidFill/>
-          </a:ln>
         </p:spPr>
         <p:txBody>
           <a:bodyPr wrap="square" anchor="t" lIns="36576" rIns="36576" tIns="0" bIns="0">
@@ -19498,9 +18862,6 @@
             <a:avLst/>
           </a:prstGeom>
           <a:noFill/>
-          <a:ln>
-            <a:solidFill/>
-          </a:ln>
         </p:spPr>
         <p:txBody>
           <a:bodyPr wrap="square" anchor="t" lIns="36576" rIns="36576" tIns="0" bIns="0">
@@ -19536,9 +18897,6 @@
             <a:avLst/>
           </a:prstGeom>
           <a:noFill/>
-          <a:ln>
-            <a:solidFill/>
-          </a:ln>
         </p:spPr>
         <p:txBody>
           <a:bodyPr wrap="square" anchor="t" lIns="36576" rIns="36576" tIns="0" bIns="0">
@@ -19592,9 +18950,6 @@
             <a:avLst/>
           </a:prstGeom>
           <a:noFill/>
-          <a:ln>
-            <a:solidFill/>
-          </a:ln>
         </p:spPr>
         <p:txBody>
           <a:bodyPr wrap="square" anchor="ctr" lIns="36576" rIns="36576" tIns="0" bIns="0">
@@ -19630,9 +18985,6 @@
             <a:avLst/>
           </a:prstGeom>
           <a:noFill/>
-          <a:ln>
-            <a:solidFill/>
-          </a:ln>
         </p:spPr>
         <p:txBody>
           <a:bodyPr wrap="square" anchor="t" lIns="36576" rIns="36576" tIns="0" bIns="0">
@@ -19668,9 +19020,6 @@
             <a:avLst/>
           </a:prstGeom>
           <a:noFill/>
-          <a:ln>
-            <a:solidFill/>
-          </a:ln>
         </p:spPr>
         <p:txBody>
           <a:bodyPr wrap="square" anchor="t" lIns="36576" rIns="36576" tIns="0" bIns="0">
@@ -20173,9 +19522,6 @@
             <a:avLst/>
           </a:prstGeom>
           <a:noFill/>
-          <a:ln>
-            <a:solidFill/>
-          </a:ln>
         </p:spPr>
         <p:txBody>
           <a:bodyPr wrap="square" anchor="t" lIns="36576" rIns="36576" tIns="0" bIns="0">
@@ -20302,9 +19648,6 @@
             <a:avLst/>
           </a:prstGeom>
           <a:noFill/>
-          <a:ln>
-            <a:solidFill/>
-          </a:ln>
         </p:spPr>
         <p:txBody>
           <a:bodyPr wrap="square" anchor="t" lIns="36576" rIns="36576" tIns="0" bIns="0">
@@ -20431,9 +19774,6 @@
             <a:avLst/>
           </a:prstGeom>
           <a:noFill/>
-          <a:ln>
-            <a:solidFill/>
-          </a:ln>
         </p:spPr>
         <p:txBody>
           <a:bodyPr wrap="square" anchor="t" lIns="36576" rIns="36576" tIns="0" bIns="0">
@@ -20560,9 +19900,6 @@
             <a:avLst/>
           </a:prstGeom>
           <a:noFill/>
-          <a:ln>
-            <a:solidFill/>
-          </a:ln>
         </p:spPr>
         <p:txBody>
           <a:bodyPr wrap="square" anchor="t" lIns="36576" rIns="36576" tIns="0" bIns="0">
@@ -20689,9 +20026,6 @@
             <a:avLst/>
           </a:prstGeom>
           <a:noFill/>
-          <a:ln>
-            <a:solidFill/>
-          </a:ln>
         </p:spPr>
         <p:txBody>
           <a:bodyPr wrap="square" anchor="t" lIns="36576" rIns="36576" tIns="0" bIns="0">
@@ -20818,9 +20152,6 @@
             <a:avLst/>
           </a:prstGeom>
           <a:noFill/>
-          <a:ln>
-            <a:solidFill/>
-          </a:ln>
         </p:spPr>
         <p:txBody>
           <a:bodyPr wrap="square" anchor="t" lIns="36576" rIns="36576" tIns="0" bIns="0">
@@ -20947,9 +20278,6 @@
             <a:avLst/>
           </a:prstGeom>
           <a:noFill/>
-          <a:ln>
-            <a:solidFill/>
-          </a:ln>
         </p:spPr>
         <p:txBody>
           <a:bodyPr wrap="square" anchor="t" lIns="36576" rIns="36576" tIns="0" bIns="0">
@@ -20985,9 +20313,6 @@
             <a:avLst/>
           </a:prstGeom>
           <a:noFill/>
-          <a:ln>
-            <a:solidFill/>
-          </a:ln>
         </p:spPr>
         <p:txBody>
           <a:bodyPr wrap="square" anchor="t" lIns="36576" rIns="36576" tIns="0" bIns="0">
@@ -21157,9 +20482,6 @@
             <a:avLst/>
           </a:prstGeom>
           <a:noFill/>
-          <a:ln>
-            <a:solidFill/>
-          </a:ln>
         </p:spPr>
         <p:txBody>
           <a:bodyPr wrap="square" anchor="t" lIns="36576" rIns="36576" tIns="0" bIns="0">
@@ -21195,9 +20517,6 @@
             <a:avLst/>
           </a:prstGeom>
           <a:noFill/>
-          <a:ln>
-            <a:solidFill/>
-          </a:ln>
         </p:spPr>
         <p:txBody>
           <a:bodyPr wrap="square" anchor="t" lIns="36576" rIns="36576" tIns="0" bIns="0">
@@ -21251,9 +20570,6 @@
             <a:avLst/>
           </a:prstGeom>
           <a:noFill/>
-          <a:ln>
-            <a:solidFill/>
-          </a:ln>
         </p:spPr>
         <p:txBody>
           <a:bodyPr wrap="square" anchor="ctr" lIns="36576" rIns="36576" tIns="0" bIns="0">
@@ -21289,9 +20605,6 @@
             <a:avLst/>
           </a:prstGeom>
           <a:noFill/>
-          <a:ln>
-            <a:solidFill/>
-          </a:ln>
         </p:spPr>
         <p:txBody>
           <a:bodyPr wrap="square" anchor="t" lIns="36576" rIns="36576" tIns="0" bIns="0">
@@ -21703,9 +21016,6 @@
             <a:avLst/>
           </a:prstGeom>
           <a:noFill/>
-          <a:ln>
-            <a:solidFill/>
-          </a:ln>
         </p:spPr>
         <p:txBody>
           <a:bodyPr wrap="square" anchor="t" lIns="36576" rIns="36576" tIns="0" bIns="0">
@@ -21851,9 +21161,6 @@
             <a:avLst/>
           </a:prstGeom>
           <a:noFill/>
-          <a:ln>
-            <a:solidFill/>
-          </a:ln>
         </p:spPr>
         <p:txBody>
           <a:bodyPr wrap="square" anchor="t" lIns="36576" rIns="36576" tIns="0" bIns="0">
@@ -22035,9 +21342,6 @@
             <a:avLst/>
           </a:prstGeom>
           <a:noFill/>
-          <a:ln>
-            <a:solidFill/>
-          </a:ln>
         </p:spPr>
         <p:txBody>
           <a:bodyPr wrap="square" anchor="t" lIns="36576" rIns="36576" tIns="0" bIns="0">
@@ -22219,9 +21523,6 @@
             <a:avLst/>
           </a:prstGeom>
           <a:noFill/>
-          <a:ln>
-            <a:solidFill/>
-          </a:ln>
         </p:spPr>
         <p:txBody>
           <a:bodyPr wrap="square" anchor="t" lIns="36576" rIns="36576" tIns="0" bIns="0">
@@ -22403,9 +21704,6 @@
             <a:avLst/>
           </a:prstGeom>
           <a:noFill/>
-          <a:ln>
-            <a:solidFill/>
-          </a:ln>
         </p:spPr>
         <p:txBody>
           <a:bodyPr wrap="square" anchor="t" lIns="36576" rIns="36576" tIns="0" bIns="0">
@@ -22587,9 +21885,6 @@
             <a:avLst/>
           </a:prstGeom>
           <a:noFill/>
-          <a:ln>
-            <a:solidFill/>
-          </a:ln>
         </p:spPr>
         <p:txBody>
           <a:bodyPr wrap="square" anchor="t" lIns="36576" rIns="36576" tIns="0" bIns="0">
@@ -22771,9 +22066,6 @@
             <a:avLst/>
           </a:prstGeom>
           <a:noFill/>
-          <a:ln>
-            <a:solidFill/>
-          </a:ln>
         </p:spPr>
         <p:txBody>
           <a:bodyPr wrap="square" anchor="t" lIns="36576" rIns="36576" tIns="0" bIns="0">
@@ -22809,9 +22101,6 @@
             <a:avLst/>
           </a:prstGeom>
           <a:noFill/>
-          <a:ln>
-            <a:solidFill/>
-          </a:ln>
         </p:spPr>
         <p:txBody>
           <a:bodyPr wrap="square" anchor="t" lIns="36576" rIns="36576" tIns="0" bIns="0">
@@ -22859,9 +22148,6 @@
             <a:avLst/>
           </a:prstGeom>
           <a:noFill/>
-          <a:ln>
-            <a:solidFill/>
-          </a:ln>
         </p:spPr>
         <p:txBody>
           <a:bodyPr wrap="square" anchor="t" lIns="36576" rIns="36576" tIns="0" bIns="0">
@@ -22897,9 +22183,6 @@
             <a:avLst/>
           </a:prstGeom>
           <a:noFill/>
-          <a:ln>
-            <a:solidFill/>
-          </a:ln>
         </p:spPr>
         <p:txBody>
           <a:bodyPr wrap="square" anchor="t" lIns="36576" rIns="36576" tIns="0" bIns="0">
